--- a/yellow.pptx
+++ b/yellow.pptx
@@ -5,10 +5,10 @@
     <p:sldMasterId id="2147483730" r:id="rId4"/>
   </p:sldMasterIdLst>
   <p:notesMasterIdLst>
-    <p:notesMasterId r:id="rId21"/>
+    <p:notesMasterId r:id="rId25"/>
   </p:notesMasterIdLst>
   <p:handoutMasterIdLst>
-    <p:handoutMasterId r:id="rId22"/>
+    <p:handoutMasterId r:id="rId26"/>
   </p:handoutMasterIdLst>
   <p:sldIdLst>
     <p:sldId id="499" r:id="rId5"/>
@@ -16,17 +16,21 @@
     <p:sldId id="513" r:id="rId7"/>
     <p:sldId id="490" r:id="rId8"/>
     <p:sldId id="502" r:id="rId9"/>
-    <p:sldId id="503" r:id="rId10"/>
-    <p:sldId id="504" r:id="rId11"/>
-    <p:sldId id="505" r:id="rId12"/>
-    <p:sldId id="506" r:id="rId13"/>
-    <p:sldId id="507" r:id="rId14"/>
-    <p:sldId id="508" r:id="rId15"/>
-    <p:sldId id="509" r:id="rId16"/>
-    <p:sldId id="510" r:id="rId17"/>
-    <p:sldId id="511" r:id="rId18"/>
-    <p:sldId id="512" r:id="rId19"/>
-    <p:sldId id="500" r:id="rId20"/>
+    <p:sldId id="514" r:id="rId10"/>
+    <p:sldId id="503" r:id="rId11"/>
+    <p:sldId id="515" r:id="rId12"/>
+    <p:sldId id="504" r:id="rId13"/>
+    <p:sldId id="516" r:id="rId14"/>
+    <p:sldId id="505" r:id="rId15"/>
+    <p:sldId id="506" r:id="rId16"/>
+    <p:sldId id="517" r:id="rId17"/>
+    <p:sldId id="507" r:id="rId18"/>
+    <p:sldId id="508" r:id="rId19"/>
+    <p:sldId id="509" r:id="rId20"/>
+    <p:sldId id="510" r:id="rId21"/>
+    <p:sldId id="511" r:id="rId22"/>
+    <p:sldId id="512" r:id="rId23"/>
+    <p:sldId id="500" r:id="rId24"/>
   </p:sldIdLst>
   <p:sldSz cx="12192000" cy="6858000"/>
   <p:notesSz cx="6858000" cy="9144000"/>
@@ -257,7 +261,7 @@
           <a:p>
             <a:fld id="{4066312F-7698-4F0F-9A70-3E64A355B831}" type="datetimeFigureOut">
               <a:rPr lang="en-US" smtClean="0"/>
-              <a:t>5/9/2024</a:t>
+              <a:t>09-May-24</a:t>
             </a:fld>
             <a:endParaRPr lang="en-US"/>
           </a:p>
@@ -435,7 +439,7 @@
           <a:p>
             <a:fld id="{3AEE4C26-09E7-49B0-B22F-A5CFFF3D3B56}" type="datetimeFigureOut">
               <a:rPr lang="en-US" smtClean="0"/>
-              <a:t>5/9/2024</a:t>
+              <a:t>09-May-24</a:t>
             </a:fld>
             <a:endParaRPr lang="en-US"/>
           </a:p>
@@ -4540,10 +4544,94 @@
       </p:grpSpPr>
       <p:sp>
         <p:nvSpPr>
+          <p:cNvPr id="3" name="Content Placeholder 2">
+            <a:extLst>
+              <a:ext uri="{FF2B5EF4-FFF2-40B4-BE49-F238E27FC236}">
+                <a16:creationId xmlns:a16="http://schemas.microsoft.com/office/drawing/2014/main" id="{52C19B47-EF97-0C66-72B2-47A29F81B845}"/>
+              </a:ext>
+            </a:extLst>
+          </p:cNvPr>
+          <p:cNvSpPr>
+            <a:spLocks noGrp="1"/>
+          </p:cNvSpPr>
+          <p:nvPr>
+            <p:ph idx="1"/>
+          </p:nvPr>
+        </p:nvSpPr>
+        <p:spPr>
+          <a:xfrm>
+            <a:off x="838200" y="1393792"/>
+            <a:ext cx="10515600" cy="4783171"/>
+          </a:xfrm>
+        </p:spPr>
+        <p:txBody>
+          <a:bodyPr/>
+          <a:lstStyle/>
+          <a:p>
+            <a:pPr marL="0" indent="0">
+              <a:buNone/>
+            </a:pPr>
+            <a:r>
+              <a:rPr lang="en-US" sz="2800" b="1"/>
+              <a:t>Liskov Substitution Principle</a:t>
+            </a:r>
+          </a:p>
+          <a:p>
+            <a:pPr marL="0" indent="0">
+              <a:buNone/>
+            </a:pPr>
+            <a:endParaRPr lang="en-US"/>
+          </a:p>
+          <a:p>
+            <a:r>
+              <a:rPr lang="en-US"/>
+              <a:t>The L in SOLID principle</a:t>
+            </a:r>
+          </a:p>
+          <a:p>
+            <a:r>
+              <a:rPr lang="en-US"/>
+              <a:t>Objects of a superclass should be replaceable with objects of a subclass without affecting the correctness of the program.</a:t>
+            </a:r>
+          </a:p>
+          <a:p>
+            <a:r>
+              <a:rPr lang="en-US" sz="2800"/>
+              <a:t>Benefits:</a:t>
+            </a:r>
+          </a:p>
+          <a:p>
+            <a:pPr lvl="1"/>
+            <a:r>
+              <a:rPr lang="en-US"/>
+              <a:t>Improved code reliability</a:t>
+            </a:r>
+          </a:p>
+          <a:p>
+            <a:pPr lvl="1"/>
+            <a:r>
+              <a:rPr lang="en-US"/>
+              <a:t>Higher reusability</a:t>
+            </a:r>
+          </a:p>
+          <a:p>
+            <a:pPr lvl="1"/>
+            <a:r>
+              <a:rPr lang="en-US"/>
+              <a:t>Easier maintainability</a:t>
+            </a:r>
+          </a:p>
+          <a:p>
+            <a:endParaRPr lang="en-US"/>
+          </a:p>
+        </p:txBody>
+      </p:sp>
+      <p:sp>
+        <p:nvSpPr>
           <p:cNvPr id="4" name="Date Placeholder 3">
             <a:extLst>
               <a:ext uri="{FF2B5EF4-FFF2-40B4-BE49-F238E27FC236}">
-                <a16:creationId xmlns:a16="http://schemas.microsoft.com/office/drawing/2014/main" id="{2A7723F3-EFFE-E6A1-A349-3D286DE8F183}"/>
+                <a16:creationId xmlns:a16="http://schemas.microsoft.com/office/drawing/2014/main" id="{CF3CE538-3910-B54F-E91E-AE05D5FA460D}"/>
               </a:ext>
             </a:extLst>
           </p:cNvPr>
@@ -4561,7 +4649,7 @@
           <a:p>
             <a:r>
               <a:rPr lang="en-US"/>
-              <a:t>10/05/2024</a:t>
+              <a:t>16/01/2024</a:t>
             </a:r>
             <a:endParaRPr lang="en-US" dirty="0"/>
           </a:p>
@@ -4572,7 +4660,7 @@
           <p:cNvPr id="5" name="Footer Placeholder 4">
             <a:extLst>
               <a:ext uri="{FF2B5EF4-FFF2-40B4-BE49-F238E27FC236}">
-                <a16:creationId xmlns:a16="http://schemas.microsoft.com/office/drawing/2014/main" id="{1F111E65-E056-A402-F42A-3B92008E6D67}"/>
+                <a16:creationId xmlns:a16="http://schemas.microsoft.com/office/drawing/2014/main" id="{50913492-4183-53D2-F02B-1272C4E1A948}"/>
               </a:ext>
             </a:extLst>
           </p:cNvPr>
@@ -4601,7 +4689,7 @@
           <p:cNvPr id="6" name="Slide Number Placeholder 5">
             <a:extLst>
               <a:ext uri="{FF2B5EF4-FFF2-40B4-BE49-F238E27FC236}">
-                <a16:creationId xmlns:a16="http://schemas.microsoft.com/office/drawing/2014/main" id="{4417CB90-93E4-37A4-6D7D-90B6BF2E34D1}"/>
+                <a16:creationId xmlns:a16="http://schemas.microsoft.com/office/drawing/2014/main" id="{7455561A-AB11-7BE0-1DB5-FFBD06E96CDF}"/>
               </a:ext>
             </a:extLst>
           </p:cNvPr>
@@ -4627,83 +4715,10 @@
       </p:sp>
       <p:sp>
         <p:nvSpPr>
-          <p:cNvPr id="3" name="Content Placeholder 2">
-            <a:extLst>
-              <a:ext uri="{FF2B5EF4-FFF2-40B4-BE49-F238E27FC236}">
-                <a16:creationId xmlns:a16="http://schemas.microsoft.com/office/drawing/2014/main" id="{F04220F3-12EB-B74D-81BE-9A26BB0EBCA7}"/>
-              </a:ext>
-            </a:extLst>
-          </p:cNvPr>
-          <p:cNvSpPr>
-            <a:spLocks noGrp="1"/>
-          </p:cNvSpPr>
-          <p:nvPr>
-            <p:ph idx="1"/>
-          </p:nvPr>
-        </p:nvSpPr>
-        <p:spPr/>
-        <p:txBody>
-          <a:bodyPr/>
-          <a:lstStyle/>
-          <a:p>
-            <a:pPr marL="0" indent="0">
-              <a:buNone/>
-            </a:pPr>
-            <a:r>
-              <a:rPr lang="en-US" b="1"/>
-              <a:t>Practice</a:t>
-            </a:r>
-          </a:p>
-          <a:p>
-            <a:pPr marL="1371600" lvl="2" indent="-457200"/>
-            <a:r>
-              <a:rPr lang="en-US" sz="3000"/>
-              <a:t>Automatized Unit Tests</a:t>
-            </a:r>
-          </a:p>
-          <a:p>
-            <a:pPr marL="1371600" lvl="2" indent="-457200"/>
-            <a:r>
-              <a:rPr lang="en-US" sz="3000"/>
-              <a:t>Mockups (Testdummies)</a:t>
-            </a:r>
-          </a:p>
-          <a:p>
-            <a:pPr marL="1371600" lvl="2" indent="-457200"/>
-            <a:r>
-              <a:rPr lang="en-US" sz="3000"/>
-              <a:t>Code Coverage Analyse</a:t>
-            </a:r>
-          </a:p>
-          <a:p>
-            <a:pPr marL="1371600" lvl="2" indent="-457200"/>
-            <a:r>
-              <a:rPr lang="en-US" sz="3000"/>
-              <a:t>Participation in Professional Events</a:t>
-            </a:r>
-          </a:p>
-          <a:p>
-            <a:pPr marL="1371600" lvl="2" indent="-457200"/>
-            <a:r>
-              <a:rPr lang="en-US" sz="3000"/>
-              <a:t>Complex Refactorings</a:t>
-            </a:r>
-          </a:p>
-          <a:p>
-            <a:pPr lvl="1"/>
-            <a:endParaRPr lang="en-US"/>
-          </a:p>
-          <a:p>
-            <a:endParaRPr lang="en-US"/>
-          </a:p>
-        </p:txBody>
-      </p:sp>
-      <p:sp>
-        <p:nvSpPr>
-          <p:cNvPr id="9" name="Title 1">
-            <a:extLst>
-              <a:ext uri="{FF2B5EF4-FFF2-40B4-BE49-F238E27FC236}">
-                <a16:creationId xmlns:a16="http://schemas.microsoft.com/office/drawing/2014/main" id="{BF0B79C9-5315-2D6B-FBF4-6F562E00B215}"/>
+          <p:cNvPr id="7" name="Title 1">
+            <a:extLst>
+              <a:ext uri="{FF2B5EF4-FFF2-40B4-BE49-F238E27FC236}">
+                <a16:creationId xmlns:a16="http://schemas.microsoft.com/office/drawing/2014/main" id="{165FD40D-C4BF-F916-F6AD-B7E13B2FEA70}"/>
               </a:ext>
             </a:extLst>
           </p:cNvPr>
@@ -4716,8 +4731,8 @@
         </p:nvSpPr>
         <p:spPr>
           <a:xfrm>
-            <a:off x="838200" y="320675"/>
-            <a:ext cx="10934700" cy="1325563"/>
+            <a:off x="628650" y="0"/>
+            <a:ext cx="10934700" cy="1393792"/>
           </a:xfrm>
         </p:spPr>
         <p:txBody>
@@ -4726,10 +4741,9 @@
           </a:bodyPr>
           <a:lstStyle/>
           <a:p>
-            <a:pPr algn="ctr"/>
-            <a:r>
-              <a:rPr lang="en-US"/>
-              <a:t>Clean Code Grade Yellow</a:t>
+            <a:r>
+              <a:rPr lang="en-US" sz="4000"/>
+              <a:t>Clean Code Grade Yellow Principles</a:t>
             </a:r>
           </a:p>
         </p:txBody>
@@ -4737,7 +4751,7 @@
     </p:spTree>
     <p:extLst>
       <p:ext uri="{BB962C8B-B14F-4D97-AF65-F5344CB8AC3E}">
-        <p14:creationId xmlns:p14="http://schemas.microsoft.com/office/powerpoint/2010/main" val="2085700646"/>
+        <p14:creationId xmlns:p14="http://schemas.microsoft.com/office/powerpoint/2010/main" val="909247148"/>
       </p:ext>
     </p:extLst>
   </p:cSld>
@@ -4867,10 +4881,15 @@
             <p:ph idx="1"/>
           </p:nvPr>
         </p:nvSpPr>
-        <p:spPr/>
+        <p:spPr>
+          <a:xfrm>
+            <a:off x="838199" y="1393791"/>
+            <a:ext cx="6148525" cy="4783171"/>
+          </a:xfrm>
+        </p:spPr>
         <p:txBody>
           <a:bodyPr>
-            <a:normAutofit fontScale="92500" lnSpcReduction="20000"/>
+            <a:normAutofit lnSpcReduction="10000"/>
           </a:bodyPr>
           <a:lstStyle/>
           <a:p>
@@ -4878,96 +4897,9 @@
               <a:buNone/>
             </a:pPr>
             <a:r>
-              <a:rPr lang="en-US" b="1" dirty="0"/>
-              <a:t>Automated Unit Test</a:t>
-            </a:r>
-          </a:p>
-          <a:p>
-            <a:pPr marL="0" indent="0">
-              <a:buNone/>
-            </a:pPr>
-            <a:r>
-              <a:rPr lang="en-US" i="0" dirty="0">
-                <a:effectLst/>
-                <a:highlight>
-                  <a:srgbClr val="FFFFFF"/>
-                </a:highlight>
-                <a:latin typeface="zeitung"/>
-              </a:rPr>
-              <a:t>Trustworthy</a:t>
-            </a:r>
-          </a:p>
-          <a:p>
-            <a:pPr marL="0" indent="0">
-              <a:buNone/>
-            </a:pPr>
-            <a:r>
-              <a:rPr lang="en-US" i="0" dirty="0">
-                <a:effectLst/>
-                <a:highlight>
-                  <a:srgbClr val="FFFFFF"/>
-                </a:highlight>
-                <a:latin typeface="zeitung"/>
-              </a:rPr>
-              <a:t>Maintainable &amp; Readable</a:t>
-            </a:r>
-          </a:p>
-          <a:p>
-            <a:pPr marL="0" indent="0">
-              <a:buNone/>
-            </a:pPr>
-            <a:r>
-              <a:rPr lang="en-US" i="0" dirty="0">
-                <a:effectLst/>
-                <a:highlight>
-                  <a:srgbClr val="FFFFFF"/>
-                </a:highlight>
-                <a:latin typeface="zeitung"/>
-              </a:rPr>
-              <a:t>Verify a Single Use Case</a:t>
-            </a:r>
-          </a:p>
-          <a:p>
-            <a:pPr marL="0" indent="0">
-              <a:buNone/>
-            </a:pPr>
-            <a:r>
-              <a:rPr lang="en-US" i="0" dirty="0">
-                <a:effectLst/>
-                <a:highlight>
-                  <a:srgbClr val="FFFFFF"/>
-                </a:highlight>
-                <a:latin typeface="zeitung"/>
-              </a:rPr>
-              <a:t>Isolated</a:t>
-            </a:r>
-          </a:p>
-          <a:p>
-            <a:pPr marL="0" indent="0">
-              <a:buNone/>
-            </a:pPr>
-            <a:r>
-              <a:rPr lang="en-US" i="0" dirty="0">
-                <a:effectLst/>
-                <a:highlight>
-                  <a:srgbClr val="FFFFFF"/>
-                </a:highlight>
-                <a:latin typeface="zeitung"/>
-              </a:rPr>
-              <a:t>Automated</a:t>
-            </a:r>
-          </a:p>
-          <a:p>
-            <a:pPr marL="0" indent="0">
-              <a:buNone/>
-            </a:pPr>
-            <a:endParaRPr lang="en-US" i="0" dirty="0">
-              <a:effectLst/>
-              <a:highlight>
-                <a:srgbClr val="FFFFFF"/>
-              </a:highlight>
-              <a:latin typeface="zeitung"/>
-            </a:endParaRPr>
+              <a:rPr lang="en-US" sz="2800" b="1" dirty="0"/>
+              <a:t>Principle of Least Astonishment</a:t>
+            </a:r>
           </a:p>
           <a:p>
             <a:pPr marL="0" indent="0">
@@ -4976,60 +4908,39 @@
             <a:endParaRPr lang="en-US" b="1" dirty="0"/>
           </a:p>
           <a:p>
-            <a:pPr algn="l" fontAlgn="base">
-              <a:buFont typeface="Arial" panose="020B0604020202020204" pitchFamily="34" charset="0"/>
-              <a:buChar char="•"/>
-            </a:pPr>
-            <a:r>
-              <a:rPr lang="en-US" b="0" i="0" dirty="0">
-                <a:solidFill>
-                  <a:srgbClr val="4B4F58"/>
-                </a:solidFill>
-                <a:effectLst/>
-                <a:highlight>
-                  <a:srgbClr val="FFFFFF"/>
-                </a:highlight>
-                <a:latin typeface="-apple-system"/>
-              </a:rPr>
-              <a:t>They save time.</a:t>
-            </a:r>
-          </a:p>
-          <a:p>
-            <a:pPr algn="l" fontAlgn="base">
-              <a:buFont typeface="Arial" panose="020B0604020202020204" pitchFamily="34" charset="0"/>
-              <a:buChar char="•"/>
-            </a:pPr>
-            <a:r>
-              <a:rPr lang="en-US" b="0" i="0" dirty="0">
-                <a:solidFill>
-                  <a:srgbClr val="4B4F58"/>
-                </a:solidFill>
-                <a:effectLst/>
-                <a:highlight>
-                  <a:srgbClr val="FFFFFF"/>
-                </a:highlight>
-                <a:latin typeface="-apple-system"/>
-              </a:rPr>
-              <a:t>They take fear.</a:t>
-            </a:r>
-          </a:p>
-          <a:p>
-            <a:pPr marL="0" indent="0">
-              <a:buNone/>
-            </a:pPr>
-            <a:endParaRPr lang="en-US" sz="2800" b="1" dirty="0"/>
-          </a:p>
-          <a:p>
+            <a:r>
+              <a:rPr lang="en-US" dirty="0"/>
+              <a:t>If a necessary feature has a high astonishment factor, it may be necessary to redesign </a:t>
+            </a:r>
+            <a:r>
+              <a:rPr lang="en-US"/>
+              <a:t>the feature</a:t>
+            </a:r>
+          </a:p>
+          <a:p>
+            <a:r>
+              <a:rPr lang="en-US"/>
+              <a:t>It emphasizes the importance of designing a system (website, app, etc.) that it behaves in a way that aligns with users' expectations</a:t>
+            </a:r>
+          </a:p>
+          <a:p>
+            <a:r>
+              <a:rPr lang="en-US"/>
+              <a:t>Minimizing user’s confusion and surprises.</a:t>
+            </a:r>
             <a:endParaRPr lang="en-US" dirty="0"/>
           </a:p>
-        </p:txBody>
-      </p:sp>
-      <p:sp>
-        <p:nvSpPr>
-          <p:cNvPr id="9" name="Title 1">
-            <a:extLst>
-              <a:ext uri="{FF2B5EF4-FFF2-40B4-BE49-F238E27FC236}">
-                <a16:creationId xmlns:a16="http://schemas.microsoft.com/office/drawing/2014/main" id="{BF0B79C9-5315-2D6B-FBF4-6F562E00B215}"/>
+          <a:p>
+            <a:endParaRPr lang="en-US" dirty="0"/>
+          </a:p>
+        </p:txBody>
+      </p:sp>
+      <p:sp>
+        <p:nvSpPr>
+          <p:cNvPr id="12" name="Title 1">
+            <a:extLst>
+              <a:ext uri="{FF2B5EF4-FFF2-40B4-BE49-F238E27FC236}">
+                <a16:creationId xmlns:a16="http://schemas.microsoft.com/office/drawing/2014/main" id="{7B407259-BE46-8ADA-FF51-5182839FF9B5}"/>
               </a:ext>
             </a:extLst>
           </p:cNvPr>
@@ -5042,8 +4953,8 @@
         </p:nvSpPr>
         <p:spPr>
           <a:xfrm>
-            <a:off x="838200" y="320675"/>
-            <a:ext cx="10934700" cy="1325563"/>
+            <a:off x="628650" y="0"/>
+            <a:ext cx="10934700" cy="1393792"/>
           </a:xfrm>
         </p:spPr>
         <p:txBody>
@@ -5054,15 +4965,60 @@
           <a:p>
             <a:r>
               <a:rPr lang="en-US" sz="4000"/>
-              <a:t>Clean Code Grade Yellow Practice</a:t>
-            </a:r>
-          </a:p>
-        </p:txBody>
-      </p:sp>
+              <a:t>Clean Code Grade Yellow Principles</a:t>
+            </a:r>
+          </a:p>
+        </p:txBody>
+      </p:sp>
+      <p:pic>
+        <p:nvPicPr>
+          <p:cNvPr id="3078" name="Picture 6" descr="template | Surprised Joey | Meme template, Templates, Memes">
+            <a:extLst>
+              <a:ext uri="{FF2B5EF4-FFF2-40B4-BE49-F238E27FC236}">
+                <a16:creationId xmlns:a16="http://schemas.microsoft.com/office/drawing/2014/main" id="{669A1638-3CEB-BD47-41B2-64E454FD6A54}"/>
+              </a:ext>
+            </a:extLst>
+          </p:cNvPr>
+          <p:cNvPicPr>
+            <a:picLocks noChangeAspect="1" noChangeArrowheads="1"/>
+          </p:cNvPicPr>
+          <p:nvPr/>
+        </p:nvPicPr>
+        <p:blipFill rotWithShape="1">
+          <a:blip r:embed="rId2">
+            <a:extLst>
+              <a:ext uri="{28A0092B-C50C-407E-A947-70E740481C1C}">
+                <a14:useLocalDpi xmlns:a14="http://schemas.microsoft.com/office/drawing/2010/main" val="0"/>
+              </a:ext>
+            </a:extLst>
+          </a:blip>
+          <a:srcRect t="25126"/>
+          <a:stretch/>
+        </p:blipFill>
+        <p:spPr bwMode="auto">
+          <a:xfrm>
+            <a:off x="6986725" y="1905778"/>
+            <a:ext cx="5054353" cy="3046444"/>
+          </a:xfrm>
+          <a:prstGeom prst="rect">
+            <a:avLst/>
+          </a:prstGeom>
+          <a:noFill/>
+          <a:extLst>
+            <a:ext uri="{909E8E84-426E-40DD-AFC4-6F175D3DCCD1}">
+              <a14:hiddenFill xmlns:a14="http://schemas.microsoft.com/office/drawing/2010/main">
+                <a:solidFill>
+                  <a:srgbClr val="FFFFFF"/>
+                </a:solidFill>
+              </a14:hiddenFill>
+            </a:ext>
+          </a:extLst>
+        </p:spPr>
+      </p:pic>
     </p:spTree>
     <p:extLst>
       <p:ext uri="{BB962C8B-B14F-4D97-AF65-F5344CB8AC3E}">
-        <p14:creationId xmlns:p14="http://schemas.microsoft.com/office/powerpoint/2010/main" val="405849883"/>
+        <p14:creationId xmlns:p14="http://schemas.microsoft.com/office/powerpoint/2010/main" val="1921919947"/>
       </p:ext>
     </p:extLst>
   </p:cSld>
@@ -5192,7 +5148,12 @@
             <p:ph idx="1"/>
           </p:nvPr>
         </p:nvSpPr>
-        <p:spPr/>
+        <p:spPr>
+          <a:xfrm>
+            <a:off x="838200" y="1393791"/>
+            <a:ext cx="10515600" cy="4783171"/>
+          </a:xfrm>
+        </p:spPr>
         <p:txBody>
           <a:bodyPr/>
           <a:lstStyle/>
@@ -5202,71 +5163,114 @@
             </a:pPr>
             <a:r>
               <a:rPr lang="en-US" sz="2800" b="1" dirty="0"/>
-              <a:t>Mockups (</a:t>
-            </a:r>
-            <a:r>
-              <a:rPr lang="en-US" sz="2800" b="1" dirty="0" err="1"/>
-              <a:t>Testdummies</a:t>
-            </a:r>
-            <a:r>
-              <a:rPr lang="en-US" sz="2800" b="1" dirty="0"/>
-              <a:t>)</a:t>
-            </a:r>
-          </a:p>
-          <a:p>
-            <a:pPr marL="0" indent="0">
-              <a:buNone/>
-            </a:pPr>
-            <a:r>
-              <a:rPr lang="en-US" dirty="0"/>
-              <a:t>Components use other components -&gt; remove dependencies</a:t>
-            </a:r>
-          </a:p>
-          <a:p>
-            <a:pPr marL="0" indent="0">
-              <a:buNone/>
-            </a:pPr>
-            <a:r>
-              <a:rPr lang="en-US" sz="2800" dirty="0"/>
-              <a:t>Alter solution using Mockups instead of real component</a:t>
-            </a:r>
-          </a:p>
-          <a:p>
-            <a:pPr marL="0" indent="0">
-              <a:buNone/>
-            </a:pPr>
+              <a:t>Information Hiding Principle</a:t>
+            </a:r>
+          </a:p>
+          <a:p>
             <a:endParaRPr lang="en-US" dirty="0"/>
           </a:p>
-          <a:p>
-            <a:pPr marL="0" indent="0">
-              <a:buNone/>
-            </a:pPr>
-            <a:r>
-              <a:rPr lang="en-US" b="0" i="0" dirty="0">
+        </p:txBody>
+      </p:sp>
+      <p:pic>
+        <p:nvPicPr>
+          <p:cNvPr id="4098" name="Picture 2">
+            <a:extLst>
+              <a:ext uri="{FF2B5EF4-FFF2-40B4-BE49-F238E27FC236}">
+                <a16:creationId xmlns:a16="http://schemas.microsoft.com/office/drawing/2014/main" id="{396E94BA-9E0D-E796-962F-6DAE703F2BBC}"/>
+              </a:ext>
+            </a:extLst>
+          </p:cNvPr>
+          <p:cNvPicPr>
+            <a:picLocks noChangeAspect="1" noChangeArrowheads="1"/>
+          </p:cNvPicPr>
+          <p:nvPr/>
+        </p:nvPicPr>
+        <p:blipFill>
+          <a:blip r:embed="rId2">
+            <a:extLst>
+              <a:ext uri="{28A0092B-C50C-407E-A947-70E740481C1C}">
+                <a14:useLocalDpi xmlns:a14="http://schemas.microsoft.com/office/drawing/2010/main" val="0"/>
+              </a:ext>
+            </a:extLst>
+          </a:blip>
+          <a:srcRect/>
+          <a:stretch>
+            <a:fillRect/>
+          </a:stretch>
+        </p:blipFill>
+        <p:spPr bwMode="auto">
+          <a:xfrm>
+            <a:off x="-870013" y="1917766"/>
+            <a:ext cx="6010961" cy="4259195"/>
+          </a:xfrm>
+          <a:prstGeom prst="rect">
+            <a:avLst/>
+          </a:prstGeom>
+          <a:noFill/>
+          <a:extLst>
+            <a:ext uri="{909E8E84-426E-40DD-AFC4-6F175D3DCCD1}">
+              <a14:hiddenFill xmlns:a14="http://schemas.microsoft.com/office/drawing/2010/main">
                 <a:solidFill>
-                  <a:srgbClr val="4B4F58"/>
+                  <a:srgbClr val="FFFFFF"/>
                 </a:solidFill>
-                <a:effectLst/>
-                <a:highlight>
-                  <a:srgbClr val="D3D3D3"/>
-                </a:highlight>
-                <a:latin typeface="-apple-system"/>
-              </a:rPr>
-              <a:t>make controllable tests possible.</a:t>
-            </a:r>
-            <a:endParaRPr lang="en-US" sz="2800" dirty="0"/>
-          </a:p>
-          <a:p>
-            <a:endParaRPr lang="en-US" dirty="0"/>
-          </a:p>
-        </p:txBody>
-      </p:sp>
-      <p:sp>
-        <p:nvSpPr>
-          <p:cNvPr id="9" name="Title 1">
-            <a:extLst>
-              <a:ext uri="{FF2B5EF4-FFF2-40B4-BE49-F238E27FC236}">
-                <a16:creationId xmlns:a16="http://schemas.microsoft.com/office/drawing/2014/main" id="{BF0B79C9-5315-2D6B-FBF4-6F562E00B215}"/>
+              </a14:hiddenFill>
+            </a:ext>
+          </a:extLst>
+        </p:spPr>
+      </p:pic>
+      <p:pic>
+        <p:nvPicPr>
+          <p:cNvPr id="4100" name="Picture 4">
+            <a:extLst>
+              <a:ext uri="{FF2B5EF4-FFF2-40B4-BE49-F238E27FC236}">
+                <a16:creationId xmlns:a16="http://schemas.microsoft.com/office/drawing/2014/main" id="{48B1364C-539F-382C-BDFB-6AD9BD45DD60}"/>
+              </a:ext>
+            </a:extLst>
+          </p:cNvPr>
+          <p:cNvPicPr>
+            <a:picLocks noChangeAspect="1" noChangeArrowheads="1"/>
+          </p:cNvPicPr>
+          <p:nvPr/>
+        </p:nvPicPr>
+        <p:blipFill>
+          <a:blip r:embed="rId3">
+            <a:extLst>
+              <a:ext uri="{28A0092B-C50C-407E-A947-70E740481C1C}">
+                <a14:useLocalDpi xmlns:a14="http://schemas.microsoft.com/office/drawing/2010/main" val="0"/>
+              </a:ext>
+            </a:extLst>
+          </a:blip>
+          <a:srcRect/>
+          <a:stretch>
+            <a:fillRect/>
+          </a:stretch>
+        </p:blipFill>
+        <p:spPr bwMode="auto">
+          <a:xfrm>
+            <a:off x="4098924" y="1917765"/>
+            <a:ext cx="7758707" cy="4259194"/>
+          </a:xfrm>
+          <a:prstGeom prst="rect">
+            <a:avLst/>
+          </a:prstGeom>
+          <a:noFill/>
+          <a:extLst>
+            <a:ext uri="{909E8E84-426E-40DD-AFC4-6F175D3DCCD1}">
+              <a14:hiddenFill xmlns:a14="http://schemas.microsoft.com/office/drawing/2010/main">
+                <a:solidFill>
+                  <a:srgbClr val="FFFFFF"/>
+                </a:solidFill>
+              </a14:hiddenFill>
+            </a:ext>
+          </a:extLst>
+        </p:spPr>
+      </p:pic>
+      <p:sp>
+        <p:nvSpPr>
+          <p:cNvPr id="12" name="Title 1">
+            <a:extLst>
+              <a:ext uri="{FF2B5EF4-FFF2-40B4-BE49-F238E27FC236}">
+                <a16:creationId xmlns:a16="http://schemas.microsoft.com/office/drawing/2014/main" id="{0F6809E0-6F7C-57C5-B6D2-04BCE46C9D7E}"/>
               </a:ext>
             </a:extLst>
           </p:cNvPr>
@@ -5279,8 +5283,8 @@
         </p:nvSpPr>
         <p:spPr>
           <a:xfrm>
-            <a:off x="838200" y="320675"/>
-            <a:ext cx="10934700" cy="1325563"/>
+            <a:off x="628650" y="0"/>
+            <a:ext cx="10934700" cy="1393792"/>
           </a:xfrm>
         </p:spPr>
         <p:txBody>
@@ -5291,7 +5295,7 @@
           <a:p>
             <a:r>
               <a:rPr lang="en-US" sz="4000"/>
-              <a:t>Clean Code Grade Yellow Practice</a:t>
+              <a:t>Clean Code Grade Yellow Principles</a:t>
             </a:r>
           </a:p>
         </p:txBody>
@@ -5299,7 +5303,7 @@
     </p:spTree>
     <p:extLst>
       <p:ext uri="{BB962C8B-B14F-4D97-AF65-F5344CB8AC3E}">
-        <p14:creationId xmlns:p14="http://schemas.microsoft.com/office/powerpoint/2010/main" val="424786677"/>
+        <p14:creationId xmlns:p14="http://schemas.microsoft.com/office/powerpoint/2010/main" val="1063465789"/>
       </p:ext>
     </p:extLst>
   </p:cSld>
@@ -5328,10 +5332,93 @@
       </p:grpSpPr>
       <p:sp>
         <p:nvSpPr>
+          <p:cNvPr id="3" name="Content Placeholder 2">
+            <a:extLst>
+              <a:ext uri="{FF2B5EF4-FFF2-40B4-BE49-F238E27FC236}">
+                <a16:creationId xmlns:a16="http://schemas.microsoft.com/office/drawing/2014/main" id="{A1861EE6-7B0F-82D2-618C-1698151852F3}"/>
+              </a:ext>
+            </a:extLst>
+          </p:cNvPr>
+          <p:cNvSpPr>
+            <a:spLocks noGrp="1"/>
+          </p:cNvSpPr>
+          <p:nvPr>
+            <p:ph idx="1"/>
+          </p:nvPr>
+        </p:nvSpPr>
+        <p:spPr>
+          <a:xfrm>
+            <a:off x="838199" y="1393792"/>
+            <a:ext cx="10934699" cy="4783171"/>
+          </a:xfrm>
+        </p:spPr>
+        <p:txBody>
+          <a:bodyPr/>
+          <a:lstStyle/>
+          <a:p>
+            <a:pPr marL="0" indent="0">
+              <a:buNone/>
+            </a:pPr>
+            <a:r>
+              <a:rPr lang="en-US" sz="2800" b="1"/>
+              <a:t>Information Hiding Principle</a:t>
+            </a:r>
+          </a:p>
+          <a:p>
+            <a:endParaRPr lang="en-US"/>
+          </a:p>
+          <a:p>
+            <a:r>
+              <a:rPr lang="en-US"/>
+              <a:t>It emphasizes the idea of restricting access to the internal implementation details of a software component and instead focusing on providing a well-defined interface for interacting with it.</a:t>
+            </a:r>
+          </a:p>
+          <a:p>
+            <a:r>
+              <a:rPr lang="en-US"/>
+              <a:t>Benefits:</a:t>
+            </a:r>
+          </a:p>
+          <a:p>
+            <a:pPr lvl="1"/>
+            <a:r>
+              <a:rPr lang="en-US"/>
+              <a:t>Improved modularity</a:t>
+            </a:r>
+          </a:p>
+          <a:p>
+            <a:pPr lvl="1"/>
+            <a:r>
+              <a:rPr lang="en-US"/>
+              <a:t>Higher reusability</a:t>
+            </a:r>
+          </a:p>
+          <a:p>
+            <a:pPr lvl="1"/>
+            <a:r>
+              <a:rPr lang="en-US"/>
+              <a:t>Higher maintainability</a:t>
+            </a:r>
+          </a:p>
+          <a:p>
+            <a:pPr lvl="1"/>
+            <a:r>
+              <a:rPr lang="en-US"/>
+              <a:t>Reduced coupling between components</a:t>
+            </a:r>
+          </a:p>
+          <a:p>
+            <a:pPr lvl="1"/>
+            <a:endParaRPr lang="en-US"/>
+          </a:p>
+        </p:txBody>
+      </p:sp>
+      <p:sp>
+        <p:nvSpPr>
           <p:cNvPr id="4" name="Date Placeholder 3">
             <a:extLst>
               <a:ext uri="{FF2B5EF4-FFF2-40B4-BE49-F238E27FC236}">
-                <a16:creationId xmlns:a16="http://schemas.microsoft.com/office/drawing/2014/main" id="{2A7723F3-EFFE-E6A1-A349-3D286DE8F183}"/>
+                <a16:creationId xmlns:a16="http://schemas.microsoft.com/office/drawing/2014/main" id="{B89FFF93-7F85-123E-5849-8039391B13BB}"/>
               </a:ext>
             </a:extLst>
           </p:cNvPr>
@@ -5349,7 +5436,7 @@
           <a:p>
             <a:r>
               <a:rPr lang="en-US"/>
-              <a:t>10/05/2024</a:t>
+              <a:t>16/01/2024</a:t>
             </a:r>
             <a:endParaRPr lang="en-US" dirty="0"/>
           </a:p>
@@ -5360,7 +5447,7 @@
           <p:cNvPr id="5" name="Footer Placeholder 4">
             <a:extLst>
               <a:ext uri="{FF2B5EF4-FFF2-40B4-BE49-F238E27FC236}">
-                <a16:creationId xmlns:a16="http://schemas.microsoft.com/office/drawing/2014/main" id="{1F111E65-E056-A402-F42A-3B92008E6D67}"/>
+                <a16:creationId xmlns:a16="http://schemas.microsoft.com/office/drawing/2014/main" id="{DDB79DD0-F44C-3713-A9E7-F42B9C50931C}"/>
               </a:ext>
             </a:extLst>
           </p:cNvPr>
@@ -5389,7 +5476,7 @@
           <p:cNvPr id="6" name="Slide Number Placeholder 5">
             <a:extLst>
               <a:ext uri="{FF2B5EF4-FFF2-40B4-BE49-F238E27FC236}">
-                <a16:creationId xmlns:a16="http://schemas.microsoft.com/office/drawing/2014/main" id="{4417CB90-93E4-37A4-6D7D-90B6BF2E34D1}"/>
+                <a16:creationId xmlns:a16="http://schemas.microsoft.com/office/drawing/2014/main" id="{57BD92CD-3241-7C4F-57BE-67304335B3B7}"/>
               </a:ext>
             </a:extLst>
           </p:cNvPr>
@@ -5415,143 +5502,35 @@
       </p:sp>
       <p:sp>
         <p:nvSpPr>
-          <p:cNvPr id="3" name="Content Placeholder 2">
-            <a:extLst>
-              <a:ext uri="{FF2B5EF4-FFF2-40B4-BE49-F238E27FC236}">
-                <a16:creationId xmlns:a16="http://schemas.microsoft.com/office/drawing/2014/main" id="{F04220F3-12EB-B74D-81BE-9A26BB0EBCA7}"/>
-              </a:ext>
-            </a:extLst>
-          </p:cNvPr>
-          <p:cNvSpPr>
-            <a:spLocks noGrp="1"/>
-          </p:cNvSpPr>
-          <p:nvPr>
-            <p:ph idx="1"/>
-          </p:nvPr>
-        </p:nvSpPr>
-        <p:spPr/>
+          <p:cNvPr id="7" name="Title 1">
+            <a:extLst>
+              <a:ext uri="{FF2B5EF4-FFF2-40B4-BE49-F238E27FC236}">
+                <a16:creationId xmlns:a16="http://schemas.microsoft.com/office/drawing/2014/main" id="{0205D5F6-C5DC-FDFD-3AAF-FEBE7F0CDC4D}"/>
+              </a:ext>
+            </a:extLst>
+          </p:cNvPr>
+          <p:cNvSpPr>
+            <a:spLocks noGrp="1"/>
+          </p:cNvSpPr>
+          <p:nvPr>
+            <p:ph type="title"/>
+          </p:nvPr>
+        </p:nvSpPr>
+        <p:spPr>
+          <a:xfrm>
+            <a:off x="628650" y="0"/>
+            <a:ext cx="10934700" cy="1393792"/>
+          </a:xfrm>
+        </p:spPr>
         <p:txBody>
           <a:bodyPr>
             <a:normAutofit/>
           </a:bodyPr>
           <a:lstStyle/>
           <a:p>
-            <a:pPr marL="0" indent="0">
-              <a:buNone/>
-            </a:pPr>
-            <a:r>
-              <a:rPr lang="en-US" sz="2800" b="1" dirty="0"/>
-              <a:t>Code Coverage </a:t>
-            </a:r>
-            <a:r>
-              <a:rPr lang="en-US" sz="2800" b="1" dirty="0" err="1"/>
-              <a:t>Analyse</a:t>
-            </a:r>
-            <a:endParaRPr lang="en-US" sz="2800" b="1" dirty="0"/>
-          </a:p>
-          <a:p>
-            <a:pPr marL="0" indent="0">
-              <a:buNone/>
-            </a:pPr>
-            <a:r>
-              <a:rPr lang="en-US" b="0" i="0" dirty="0">
-                <a:solidFill>
-                  <a:srgbClr val="172B4D"/>
-                </a:solidFill>
-                <a:effectLst/>
-                <a:highlight>
-                  <a:srgbClr val="FFFFFF"/>
-                </a:highlight>
-                <a:latin typeface="-apple-system"/>
-              </a:rPr>
-              <a:t>Code Coverage Analysis is the process of discovering code within a program that is not being exercised by test cases. This information can then be used to improve the test suite, either by adding tests or modifying existing tests to increase coverage.</a:t>
-            </a:r>
-            <a:endParaRPr lang="en-US" b="1" i="0" dirty="0">
-              <a:solidFill>
-                <a:srgbClr val="172B4D"/>
-              </a:solidFill>
-              <a:effectLst/>
-              <a:highlight>
-                <a:srgbClr val="FFFFFF"/>
-              </a:highlight>
-              <a:latin typeface="-apple-system"/>
-            </a:endParaRPr>
-          </a:p>
-          <a:p>
-            <a:pPr marL="0" indent="0">
-              <a:buNone/>
-            </a:pPr>
-            <a:endParaRPr lang="en-US" sz="2800" b="1" dirty="0">
-              <a:solidFill>
-                <a:srgbClr val="172B4D"/>
-              </a:solidFill>
-              <a:highlight>
-                <a:srgbClr val="FFFFFF"/>
-              </a:highlight>
-              <a:latin typeface="-apple-system"/>
-            </a:endParaRPr>
-          </a:p>
-          <a:p>
-            <a:pPr marL="0" indent="0">
-              <a:buNone/>
-            </a:pPr>
-            <a:r>
-              <a:rPr lang="en-US" b="0" i="0" dirty="0">
-                <a:solidFill>
-                  <a:srgbClr val="172B4D"/>
-                </a:solidFill>
-                <a:effectLst/>
-                <a:highlight>
-                  <a:srgbClr val="FFFFFF"/>
-                </a:highlight>
-                <a:latin typeface="-apple-system"/>
-              </a:rPr>
-              <a:t>Code Coverage Analysis shines a light on the quality of your unit testing. It enables developers to quickly and easily improve the quality of their unit tests which ultimately leads to improved quality of the software under development.</a:t>
-            </a:r>
-            <a:endParaRPr lang="en-US" sz="2800" b="1" dirty="0"/>
-          </a:p>
-          <a:p>
-            <a:pPr marL="0" indent="0">
-              <a:buNone/>
-            </a:pPr>
-            <a:endParaRPr lang="en-US" sz="2800" b="1" dirty="0"/>
-          </a:p>
-          <a:p>
-            <a:endParaRPr lang="en-US" dirty="0"/>
-          </a:p>
-        </p:txBody>
-      </p:sp>
-      <p:sp>
-        <p:nvSpPr>
-          <p:cNvPr id="9" name="Title 1">
-            <a:extLst>
-              <a:ext uri="{FF2B5EF4-FFF2-40B4-BE49-F238E27FC236}">
-                <a16:creationId xmlns:a16="http://schemas.microsoft.com/office/drawing/2014/main" id="{BF0B79C9-5315-2D6B-FBF4-6F562E00B215}"/>
-              </a:ext>
-            </a:extLst>
-          </p:cNvPr>
-          <p:cNvSpPr>
-            <a:spLocks noGrp="1"/>
-          </p:cNvSpPr>
-          <p:nvPr>
-            <p:ph type="title"/>
-          </p:nvPr>
-        </p:nvSpPr>
-        <p:spPr>
-          <a:xfrm>
-            <a:off x="838200" y="320675"/>
-            <a:ext cx="10934700" cy="1325563"/>
-          </a:xfrm>
-        </p:spPr>
-        <p:txBody>
-          <a:bodyPr>
-            <a:normAutofit/>
-          </a:bodyPr>
-          <a:lstStyle/>
-          <a:p>
             <a:r>
               <a:rPr lang="en-US" sz="4000"/>
-              <a:t>Clean Code Grade Yellow Practice</a:t>
+              <a:t>Clean Code Grade Yellow Principles</a:t>
             </a:r>
           </a:p>
         </p:txBody>
@@ -5559,7 +5538,7 @@
     </p:spTree>
     <p:extLst>
       <p:ext uri="{BB962C8B-B14F-4D97-AF65-F5344CB8AC3E}">
-        <p14:creationId xmlns:p14="http://schemas.microsoft.com/office/powerpoint/2010/main" val="3823045925"/>
+        <p14:creationId xmlns:p14="http://schemas.microsoft.com/office/powerpoint/2010/main" val="3886949195"/>
       </p:ext>
     </p:extLst>
   </p:cSld>
@@ -5698,37 +5677,51 @@
               <a:buNone/>
             </a:pPr>
             <a:r>
-              <a:rPr lang="en-US" sz="2800" b="1" dirty="0"/>
+              <a:rPr lang="en-US" b="1"/>
+              <a:t>Practice</a:t>
+            </a:r>
+          </a:p>
+          <a:p>
+            <a:pPr marL="1371600" lvl="2" indent="-457200"/>
+            <a:r>
+              <a:rPr lang="en-US" sz="3000"/>
+              <a:t>Automated Unit Tests</a:t>
+            </a:r>
+          </a:p>
+          <a:p>
+            <a:pPr marL="1371600" lvl="2" indent="-457200"/>
+            <a:r>
+              <a:rPr lang="en-US" sz="3000"/>
+              <a:t>Mockups</a:t>
+            </a:r>
+          </a:p>
+          <a:p>
+            <a:pPr marL="1371600" lvl="2" indent="-457200"/>
+            <a:r>
+              <a:rPr lang="en-US" sz="3000"/>
+              <a:t>Code Coverage Analyse</a:t>
+            </a:r>
+          </a:p>
+          <a:p>
+            <a:pPr marL="1371600" lvl="2" indent="-457200"/>
+            <a:r>
+              <a:rPr lang="en-US" sz="3000"/>
               <a:t>Participation in Professional Events</a:t>
             </a:r>
           </a:p>
           <a:p>
-            <a:pPr marL="0" indent="0">
-              <a:buNone/>
-            </a:pPr>
-            <a:endParaRPr lang="en-US" sz="2800" b="1" dirty="0"/>
-          </a:p>
-          <a:p>
-            <a:pPr marL="0" indent="0">
-              <a:buNone/>
-            </a:pPr>
-            <a:r>
-              <a:rPr lang="en-US" b="0" i="0" dirty="0">
-                <a:solidFill>
-                  <a:srgbClr val="4B4F58"/>
-                </a:solidFill>
-                <a:effectLst/>
-                <a:highlight>
-                  <a:srgbClr val="FFFFFF"/>
-                </a:highlight>
-                <a:latin typeface="-apple-system"/>
-              </a:rPr>
-              <a:t> The own developer team, a regional user group and national or international conferences</a:t>
-            </a:r>
-            <a:endParaRPr lang="en-US" sz="2800" b="1" dirty="0"/>
-          </a:p>
-          <a:p>
-            <a:endParaRPr lang="en-US" dirty="0"/>
+            <a:pPr marL="1371600" lvl="2" indent="-457200"/>
+            <a:r>
+              <a:rPr lang="en-US" sz="3000"/>
+              <a:t>Complex Refactorings</a:t>
+            </a:r>
+          </a:p>
+          <a:p>
+            <a:pPr lvl="1"/>
+            <a:endParaRPr lang="en-US"/>
+          </a:p>
+          <a:p>
+            <a:endParaRPr lang="en-US"/>
           </a:p>
         </p:txBody>
       </p:sp>
@@ -5760,9 +5753,10 @@
           </a:bodyPr>
           <a:lstStyle/>
           <a:p>
-            <a:r>
-              <a:rPr lang="en-US" sz="4000"/>
-              <a:t>Clean Code Grade Yellow Principles</a:t>
+            <a:pPr algn="ctr"/>
+            <a:r>
+              <a:rPr lang="en-US"/>
+              <a:t>Clean Code Yellow Grade</a:t>
             </a:r>
           </a:p>
         </p:txBody>
@@ -5770,7 +5764,7 @@
     </p:spTree>
     <p:extLst>
       <p:ext uri="{BB962C8B-B14F-4D97-AF65-F5344CB8AC3E}">
-        <p14:creationId xmlns:p14="http://schemas.microsoft.com/office/powerpoint/2010/main" val="1930022487"/>
+        <p14:creationId xmlns:p14="http://schemas.microsoft.com/office/powerpoint/2010/main" val="2085700646"/>
       </p:ext>
     </p:extLst>
   </p:cSld>
@@ -5900,10 +5894,15 @@
             <p:ph idx="1"/>
           </p:nvPr>
         </p:nvSpPr>
-        <p:spPr/>
+        <p:spPr>
+          <a:xfrm>
+            <a:off x="838200" y="1825625"/>
+            <a:ext cx="10515600" cy="4015882"/>
+          </a:xfrm>
+        </p:spPr>
         <p:txBody>
           <a:bodyPr>
-            <a:normAutofit fontScale="92500" lnSpcReduction="20000"/>
+            <a:normAutofit/>
           </a:bodyPr>
           <a:lstStyle/>
           <a:p>
@@ -5911,147 +5910,49 @@
               <a:buNone/>
             </a:pPr>
             <a:r>
-              <a:rPr lang="en-US" sz="2800" b="1" dirty="0"/>
-              <a:t>Complex </a:t>
-            </a:r>
-            <a:r>
-              <a:rPr lang="en-US" sz="2800" b="1" dirty="0" err="1"/>
-              <a:t>Refactorings</a:t>
-            </a:r>
-            <a:endParaRPr lang="en-US" sz="2800" b="1" dirty="0"/>
-          </a:p>
-          <a:p>
-            <a:pPr marL="0" indent="0">
-              <a:buNone/>
-            </a:pPr>
-            <a:r>
-              <a:rPr lang="en-US" sz="2800" dirty="0" err="1"/>
-              <a:t>Fators</a:t>
-            </a:r>
-            <a:r>
-              <a:rPr lang="en-US" sz="2800" dirty="0"/>
-              <a:t>: source code architecture</a:t>
-            </a:r>
-          </a:p>
-          <a:p>
-            <a:pPr marL="0" indent="0">
-              <a:buNone/>
-            </a:pPr>
-            <a:endParaRPr lang="en-US" sz="2800" dirty="0"/>
-          </a:p>
-          <a:p>
-            <a:pPr marL="0" indent="0">
-              <a:buNone/>
-            </a:pPr>
-            <a:r>
-              <a:rPr lang="en-US" dirty="0" err="1"/>
-              <a:t>Splir</a:t>
-            </a:r>
-            <a:r>
-              <a:rPr lang="en-US" dirty="0"/>
-              <a:t> or merge classes, modules</a:t>
-            </a:r>
-          </a:p>
-          <a:p>
-            <a:pPr marL="0" indent="0">
-              <a:buNone/>
-            </a:pPr>
-            <a:r>
-              <a:rPr lang="en-US" dirty="0"/>
-              <a:t>Optimize </a:t>
-            </a:r>
-            <a:r>
-              <a:rPr lang="en-US" dirty="0">
-                <a:solidFill>
-                  <a:srgbClr val="0D0D0D"/>
-                </a:solidFill>
-                <a:highlight>
-                  <a:srgbClr val="FFFFFF"/>
-                </a:highlight>
-                <a:latin typeface="Söhne"/>
-              </a:rPr>
-              <a:t>a</a:t>
-            </a:r>
-            <a:r>
-              <a:rPr lang="en-US" b="0" i="0" dirty="0">
-                <a:solidFill>
-                  <a:srgbClr val="0D0D0D"/>
-                </a:solidFill>
-                <a:effectLst/>
-                <a:highlight>
-                  <a:srgbClr val="FFFFFF"/>
-                </a:highlight>
-                <a:latin typeface="Söhne"/>
-              </a:rPr>
-              <a:t>pplication  </a:t>
-            </a:r>
-            <a:r>
-              <a:rPr lang="en-US" dirty="0"/>
-              <a:t>performance</a:t>
-            </a:r>
-          </a:p>
-          <a:p>
-            <a:pPr marL="0" indent="0">
-              <a:buNone/>
-            </a:pPr>
-            <a:r>
-              <a:rPr lang="en-US" dirty="0"/>
-              <a:t>Changing a</a:t>
-            </a:r>
-            <a:r>
-              <a:rPr lang="en-US" b="0" i="0" dirty="0">
-                <a:solidFill>
-                  <a:srgbClr val="0D0D0D"/>
-                </a:solidFill>
-                <a:effectLst/>
-                <a:highlight>
-                  <a:srgbClr val="FFFFFF"/>
-                </a:highlight>
-                <a:latin typeface="Söhne"/>
-              </a:rPr>
-              <a:t>pplication Architecture, programming language, framework</a:t>
-            </a:r>
-          </a:p>
-          <a:p>
-            <a:pPr marL="0" indent="0">
-              <a:buNone/>
-            </a:pPr>
-            <a:endParaRPr lang="en-US" sz="2800" dirty="0"/>
-          </a:p>
-          <a:p>
-            <a:pPr marL="0" indent="0">
-              <a:buNone/>
-            </a:pPr>
-            <a:r>
-              <a:rPr lang="en-US" dirty="0"/>
-              <a:t>improve the quality of the code</a:t>
-            </a:r>
-          </a:p>
-          <a:p>
-            <a:pPr marL="0" indent="0">
-              <a:buNone/>
-            </a:pPr>
-            <a:r>
-              <a:rPr lang="en-US" dirty="0"/>
-              <a:t>Improve the design</a:t>
-            </a:r>
-          </a:p>
-          <a:p>
-            <a:pPr marL="0" indent="0">
-              <a:buNone/>
-            </a:pPr>
-            <a:r>
-              <a:rPr lang="en-US" sz="2800" dirty="0"/>
-              <a:t>Maintain and update</a:t>
-            </a:r>
-          </a:p>
-          <a:p>
-            <a:pPr marL="0" indent="0">
-              <a:buNone/>
-            </a:pPr>
-            <a:endParaRPr lang="en-US" sz="2800" dirty="0"/>
-          </a:p>
-          <a:p>
+              <a:rPr lang="en-US" b="1" dirty="0"/>
+              <a:t>Automated Unit Test</a:t>
+            </a:r>
+          </a:p>
+          <a:p>
+            <a:r>
+              <a:rPr lang="en-US"/>
+              <a:t>Writing small, focused tests that verify the functionality of individual units of code (functions, classes, modules), executed automatically, providing feedback on code</a:t>
+            </a:r>
+          </a:p>
+          <a:p>
+            <a:r>
+              <a:rPr lang="en-US"/>
+              <a:t>Importance to:</a:t>
+            </a:r>
+          </a:p>
+          <a:p>
+            <a:pPr lvl="1"/>
+            <a:r>
+              <a:rPr lang="en-US"/>
+              <a:t>Get early feedback</a:t>
+            </a:r>
+          </a:p>
+          <a:p>
+            <a:pPr lvl="1"/>
+            <a:r>
+              <a:rPr lang="en-US"/>
+              <a:t>Refactoring with confidence</a:t>
+            </a:r>
+          </a:p>
+          <a:p>
+            <a:pPr lvl="1"/>
+            <a:r>
+              <a:rPr lang="en-US"/>
+              <a:t>Improved code documentation</a:t>
+            </a:r>
+          </a:p>
+          <a:p>
+            <a:pPr lvl="1"/>
+            <a:r>
+              <a:rPr lang="en-US"/>
+              <a:t>Continuous Integration (CI pipline)</a:t>
+            </a:r>
             <a:endParaRPr lang="en-US" dirty="0"/>
           </a:p>
         </p:txBody>
@@ -6086,7 +5987,7 @@
           <a:p>
             <a:r>
               <a:rPr lang="en-US" sz="4000"/>
-              <a:t>Clean Code Grade Yellow Principles</a:t>
+              <a:t>Clean Code Yellow Grade Practice</a:t>
             </a:r>
           </a:p>
         </p:txBody>
@@ -6094,7 +5995,7 @@
     </p:spTree>
     <p:extLst>
       <p:ext uri="{BB962C8B-B14F-4D97-AF65-F5344CB8AC3E}">
-        <p14:creationId xmlns:p14="http://schemas.microsoft.com/office/powerpoint/2010/main" val="3472894490"/>
+        <p14:creationId xmlns:p14="http://schemas.microsoft.com/office/powerpoint/2010/main" val="405849883"/>
       </p:ext>
     </p:extLst>
   </p:cSld>
@@ -6123,44 +6024,10 @@
       </p:grpSpPr>
       <p:sp>
         <p:nvSpPr>
-          <p:cNvPr id="2" name="Title 1">
-            <a:extLst>
-              <a:ext uri="{FF2B5EF4-FFF2-40B4-BE49-F238E27FC236}">
-                <a16:creationId xmlns:a16="http://schemas.microsoft.com/office/drawing/2014/main" id="{727D4E91-3127-5564-D021-AF651A480EA6}"/>
-              </a:ext>
-            </a:extLst>
-          </p:cNvPr>
-          <p:cNvSpPr>
-            <a:spLocks noGrp="1"/>
-          </p:cNvSpPr>
-          <p:nvPr>
-            <p:ph type="title"/>
-          </p:nvPr>
-        </p:nvSpPr>
-        <p:spPr>
-          <a:xfrm>
-            <a:off x="838200" y="2766218"/>
-            <a:ext cx="10515600" cy="1325563"/>
-          </a:xfrm>
-        </p:spPr>
-        <p:txBody>
-          <a:bodyPr/>
-          <a:lstStyle/>
-          <a:p>
-            <a:pPr algn="ctr"/>
-            <a:r>
-              <a:rPr lang="en-US" dirty="0"/>
-              <a:t>Answer the questions</a:t>
-            </a:r>
-          </a:p>
-        </p:txBody>
-      </p:sp>
-      <p:sp>
-        <p:nvSpPr>
           <p:cNvPr id="4" name="Date Placeholder 3">
             <a:extLst>
               <a:ext uri="{FF2B5EF4-FFF2-40B4-BE49-F238E27FC236}">
-                <a16:creationId xmlns:a16="http://schemas.microsoft.com/office/drawing/2014/main" id="{E7A36B01-0E5B-6A18-18CB-4618F60F150A}"/>
+                <a16:creationId xmlns:a16="http://schemas.microsoft.com/office/drawing/2014/main" id="{2A7723F3-EFFE-E6A1-A349-3D286DE8F183}"/>
               </a:ext>
             </a:extLst>
           </p:cNvPr>
@@ -6189,7 +6056,7 @@
           <p:cNvPr id="5" name="Footer Placeholder 4">
             <a:extLst>
               <a:ext uri="{FF2B5EF4-FFF2-40B4-BE49-F238E27FC236}">
-                <a16:creationId xmlns:a16="http://schemas.microsoft.com/office/drawing/2014/main" id="{20C896B9-583B-690B-D72F-E400BFBAD7D4}"/>
+                <a16:creationId xmlns:a16="http://schemas.microsoft.com/office/drawing/2014/main" id="{1F111E65-E056-A402-F42A-3B92008E6D67}"/>
               </a:ext>
             </a:extLst>
           </p:cNvPr>
@@ -6218,7 +6085,7 @@
           <p:cNvPr id="6" name="Slide Number Placeholder 5">
             <a:extLst>
               <a:ext uri="{FF2B5EF4-FFF2-40B4-BE49-F238E27FC236}">
-                <a16:creationId xmlns:a16="http://schemas.microsoft.com/office/drawing/2014/main" id="{E33F870A-03E6-2009-4646-281250011AAA}"/>
+                <a16:creationId xmlns:a16="http://schemas.microsoft.com/office/drawing/2014/main" id="{4417CB90-93E4-37A4-6D7D-90B6BF2E34D1}"/>
               </a:ext>
             </a:extLst>
           </p:cNvPr>
@@ -6242,10 +6109,783 @@
           </a:p>
         </p:txBody>
       </p:sp>
+      <p:sp>
+        <p:nvSpPr>
+          <p:cNvPr id="3" name="Content Placeholder 2">
+            <a:extLst>
+              <a:ext uri="{FF2B5EF4-FFF2-40B4-BE49-F238E27FC236}">
+                <a16:creationId xmlns:a16="http://schemas.microsoft.com/office/drawing/2014/main" id="{F04220F3-12EB-B74D-81BE-9A26BB0EBCA7}"/>
+              </a:ext>
+            </a:extLst>
+          </p:cNvPr>
+          <p:cNvSpPr>
+            <a:spLocks noGrp="1"/>
+          </p:cNvSpPr>
+          <p:nvPr>
+            <p:ph idx="1"/>
+          </p:nvPr>
+        </p:nvSpPr>
+        <p:spPr/>
+        <p:txBody>
+          <a:bodyPr/>
+          <a:lstStyle/>
+          <a:p>
+            <a:pPr marL="0" indent="0">
+              <a:buNone/>
+            </a:pPr>
+            <a:r>
+              <a:rPr lang="en-US" sz="2800" b="1"/>
+              <a:t>Mockups </a:t>
+            </a:r>
+          </a:p>
+          <a:p>
+            <a:r>
+              <a:rPr lang="en-US"/>
+              <a:t>Using mockups to isolated component test.</a:t>
+            </a:r>
+          </a:p>
+          <a:p>
+            <a:r>
+              <a:rPr lang="en-US"/>
+              <a:t>Benefits:</a:t>
+            </a:r>
+          </a:p>
+          <a:p>
+            <a:pPr lvl="1"/>
+            <a:r>
+              <a:rPr lang="en-US"/>
+              <a:t>Focus on User-Centric Design</a:t>
+            </a:r>
+          </a:p>
+          <a:p>
+            <a:pPr lvl="1"/>
+            <a:r>
+              <a:rPr lang="en-US"/>
+              <a:t>Improved Communication</a:t>
+            </a:r>
+          </a:p>
+          <a:p>
+            <a:pPr lvl="1"/>
+            <a:r>
+              <a:rPr lang="en-US"/>
+              <a:t>Early Issue Identification</a:t>
+            </a:r>
+          </a:p>
+        </p:txBody>
+      </p:sp>
+      <p:sp>
+        <p:nvSpPr>
+          <p:cNvPr id="9" name="Title 1">
+            <a:extLst>
+              <a:ext uri="{FF2B5EF4-FFF2-40B4-BE49-F238E27FC236}">
+                <a16:creationId xmlns:a16="http://schemas.microsoft.com/office/drawing/2014/main" id="{BF0B79C9-5315-2D6B-FBF4-6F562E00B215}"/>
+              </a:ext>
+            </a:extLst>
+          </p:cNvPr>
+          <p:cNvSpPr>
+            <a:spLocks noGrp="1"/>
+          </p:cNvSpPr>
+          <p:nvPr>
+            <p:ph type="title"/>
+          </p:nvPr>
+        </p:nvSpPr>
+        <p:spPr>
+          <a:xfrm>
+            <a:off x="838200" y="320675"/>
+            <a:ext cx="10934700" cy="1325563"/>
+          </a:xfrm>
+        </p:spPr>
+        <p:txBody>
+          <a:bodyPr>
+            <a:normAutofit/>
+          </a:bodyPr>
+          <a:lstStyle/>
+          <a:p>
+            <a:r>
+              <a:rPr lang="en-US" sz="4000"/>
+              <a:t>Clean Code Yellow Grade Practice</a:t>
+            </a:r>
+          </a:p>
+        </p:txBody>
+      </p:sp>
     </p:spTree>
     <p:extLst>
       <p:ext uri="{BB962C8B-B14F-4D97-AF65-F5344CB8AC3E}">
-        <p14:creationId xmlns:p14="http://schemas.microsoft.com/office/powerpoint/2010/main" val="1243198624"/>
+        <p14:creationId xmlns:p14="http://schemas.microsoft.com/office/powerpoint/2010/main" val="424786677"/>
+      </p:ext>
+    </p:extLst>
+  </p:cSld>
+  <p:clrMapOvr>
+    <a:masterClrMapping/>
+  </p:clrMapOvr>
+</p:sld>
+</file>
+
+<file path=ppt/slides/slide17.xml><?xml version="1.0" encoding="utf-8"?>
+<p:sld xmlns:a="http://schemas.openxmlformats.org/drawingml/2006/main" xmlns:r="http://schemas.openxmlformats.org/officeDocument/2006/relationships" xmlns:p="http://schemas.openxmlformats.org/presentationml/2006/main">
+  <p:cSld>
+    <p:spTree>
+      <p:nvGrpSpPr>
+        <p:cNvPr id="1" name=""/>
+        <p:cNvGrpSpPr/>
+        <p:nvPr/>
+      </p:nvGrpSpPr>
+      <p:grpSpPr>
+        <a:xfrm>
+          <a:off x="0" y="0"/>
+          <a:ext cx="0" cy="0"/>
+          <a:chOff x="0" y="0"/>
+          <a:chExt cx="0" cy="0"/>
+        </a:xfrm>
+      </p:grpSpPr>
+      <p:sp>
+        <p:nvSpPr>
+          <p:cNvPr id="4" name="Date Placeholder 3">
+            <a:extLst>
+              <a:ext uri="{FF2B5EF4-FFF2-40B4-BE49-F238E27FC236}">
+                <a16:creationId xmlns:a16="http://schemas.microsoft.com/office/drawing/2014/main" id="{2A7723F3-EFFE-E6A1-A349-3D286DE8F183}"/>
+              </a:ext>
+            </a:extLst>
+          </p:cNvPr>
+          <p:cNvSpPr>
+            <a:spLocks noGrp="1"/>
+          </p:cNvSpPr>
+          <p:nvPr>
+            <p:ph type="dt" sz="half" idx="10"/>
+          </p:nvPr>
+        </p:nvSpPr>
+        <p:spPr/>
+        <p:txBody>
+          <a:bodyPr/>
+          <a:lstStyle/>
+          <a:p>
+            <a:r>
+              <a:rPr lang="en-US"/>
+              <a:t>10/05/2024</a:t>
+            </a:r>
+            <a:endParaRPr lang="en-US" dirty="0"/>
+          </a:p>
+        </p:txBody>
+      </p:sp>
+      <p:sp>
+        <p:nvSpPr>
+          <p:cNvPr id="5" name="Footer Placeholder 4">
+            <a:extLst>
+              <a:ext uri="{FF2B5EF4-FFF2-40B4-BE49-F238E27FC236}">
+                <a16:creationId xmlns:a16="http://schemas.microsoft.com/office/drawing/2014/main" id="{1F111E65-E056-A402-F42A-3B92008E6D67}"/>
+              </a:ext>
+            </a:extLst>
+          </p:cNvPr>
+          <p:cNvSpPr>
+            <a:spLocks noGrp="1"/>
+          </p:cNvSpPr>
+          <p:nvPr>
+            <p:ph type="ftr" sz="quarter" idx="11"/>
+          </p:nvPr>
+        </p:nvSpPr>
+        <p:spPr/>
+        <p:txBody>
+          <a:bodyPr/>
+          <a:lstStyle/>
+          <a:p>
+            <a:r>
+              <a:rPr lang="en-US"/>
+              <a:t>GSI</a:t>
+            </a:r>
+            <a:endParaRPr lang="en-US" dirty="0"/>
+          </a:p>
+        </p:txBody>
+      </p:sp>
+      <p:sp>
+        <p:nvSpPr>
+          <p:cNvPr id="6" name="Slide Number Placeholder 5">
+            <a:extLst>
+              <a:ext uri="{FF2B5EF4-FFF2-40B4-BE49-F238E27FC236}">
+                <a16:creationId xmlns:a16="http://schemas.microsoft.com/office/drawing/2014/main" id="{4417CB90-93E4-37A4-6D7D-90B6BF2E34D1}"/>
+              </a:ext>
+            </a:extLst>
+          </p:cNvPr>
+          <p:cNvSpPr>
+            <a:spLocks noGrp="1"/>
+          </p:cNvSpPr>
+          <p:nvPr>
+            <p:ph type="sldNum" sz="quarter" idx="12"/>
+          </p:nvPr>
+        </p:nvSpPr>
+        <p:spPr/>
+        <p:txBody>
+          <a:bodyPr/>
+          <a:lstStyle/>
+          <a:p>
+            <a:fld id="{2FB79C59-F32A-44C5-BD88-D6F83C6AD380}" type="slidenum">
+              <a:rPr lang="en-US" smtClean="0"/>
+              <a:t>17</a:t>
+            </a:fld>
+            <a:endParaRPr lang="en-US"/>
+          </a:p>
+        </p:txBody>
+      </p:sp>
+      <p:sp>
+        <p:nvSpPr>
+          <p:cNvPr id="3" name="Content Placeholder 2">
+            <a:extLst>
+              <a:ext uri="{FF2B5EF4-FFF2-40B4-BE49-F238E27FC236}">
+                <a16:creationId xmlns:a16="http://schemas.microsoft.com/office/drawing/2014/main" id="{F04220F3-12EB-B74D-81BE-9A26BB0EBCA7}"/>
+              </a:ext>
+            </a:extLst>
+          </p:cNvPr>
+          <p:cNvSpPr>
+            <a:spLocks noGrp="1"/>
+          </p:cNvSpPr>
+          <p:nvPr>
+            <p:ph idx="1"/>
+          </p:nvPr>
+        </p:nvSpPr>
+        <p:spPr/>
+        <p:txBody>
+          <a:bodyPr>
+            <a:normAutofit/>
+          </a:bodyPr>
+          <a:lstStyle/>
+          <a:p>
+            <a:pPr marL="0" indent="0">
+              <a:buNone/>
+            </a:pPr>
+            <a:r>
+              <a:rPr lang="en-US" sz="2800" b="1" dirty="0"/>
+              <a:t>Code Coverage </a:t>
+            </a:r>
+            <a:r>
+              <a:rPr lang="en-US" sz="2800" b="1" dirty="0" err="1"/>
+              <a:t>Analyse</a:t>
+            </a:r>
+            <a:endParaRPr lang="en-US" sz="2800" b="1" dirty="0"/>
+          </a:p>
+          <a:p>
+            <a:r>
+              <a:rPr lang="en-US"/>
+              <a:t>A technique that measures the percentage of source code that is executed during the execution of unit tests</a:t>
+            </a:r>
+          </a:p>
+          <a:p>
+            <a:r>
+              <a:rPr lang="en-US" sz="2800"/>
+              <a:t>Benefits:</a:t>
+            </a:r>
+          </a:p>
+          <a:p>
+            <a:pPr lvl="1"/>
+            <a:r>
+              <a:rPr lang="en-US"/>
+              <a:t>Ensure code quality</a:t>
+            </a:r>
+          </a:p>
+          <a:p>
+            <a:pPr lvl="1"/>
+            <a:r>
+              <a:rPr lang="en-US"/>
+              <a:t>Improve testing efficiency</a:t>
+            </a:r>
+          </a:p>
+          <a:p>
+            <a:pPr lvl="1"/>
+            <a:r>
+              <a:rPr lang="en-US"/>
+              <a:t>Increase confidence in code</a:t>
+            </a:r>
+          </a:p>
+          <a:p>
+            <a:pPr lvl="1"/>
+            <a:r>
+              <a:rPr lang="en-US"/>
+              <a:t>Detect dead code</a:t>
+            </a:r>
+            <a:endParaRPr lang="en-US" dirty="0"/>
+          </a:p>
+          <a:p>
+            <a:endParaRPr lang="en-US" dirty="0"/>
+          </a:p>
+        </p:txBody>
+      </p:sp>
+      <p:sp>
+        <p:nvSpPr>
+          <p:cNvPr id="9" name="Title 1">
+            <a:extLst>
+              <a:ext uri="{FF2B5EF4-FFF2-40B4-BE49-F238E27FC236}">
+                <a16:creationId xmlns:a16="http://schemas.microsoft.com/office/drawing/2014/main" id="{BF0B79C9-5315-2D6B-FBF4-6F562E00B215}"/>
+              </a:ext>
+            </a:extLst>
+          </p:cNvPr>
+          <p:cNvSpPr>
+            <a:spLocks noGrp="1"/>
+          </p:cNvSpPr>
+          <p:nvPr>
+            <p:ph type="title"/>
+          </p:nvPr>
+        </p:nvSpPr>
+        <p:spPr>
+          <a:xfrm>
+            <a:off x="838200" y="320675"/>
+            <a:ext cx="10934700" cy="1325563"/>
+          </a:xfrm>
+        </p:spPr>
+        <p:txBody>
+          <a:bodyPr>
+            <a:normAutofit/>
+          </a:bodyPr>
+          <a:lstStyle/>
+          <a:p>
+            <a:r>
+              <a:rPr lang="en-US" sz="4000"/>
+              <a:t>Clean Code Yellow Grade Practice</a:t>
+            </a:r>
+          </a:p>
+        </p:txBody>
+      </p:sp>
+    </p:spTree>
+    <p:extLst>
+      <p:ext uri="{BB962C8B-B14F-4D97-AF65-F5344CB8AC3E}">
+        <p14:creationId xmlns:p14="http://schemas.microsoft.com/office/powerpoint/2010/main" val="3823045925"/>
+      </p:ext>
+    </p:extLst>
+  </p:cSld>
+  <p:clrMapOvr>
+    <a:masterClrMapping/>
+  </p:clrMapOvr>
+</p:sld>
+</file>
+
+<file path=ppt/slides/slide18.xml><?xml version="1.0" encoding="utf-8"?>
+<p:sld xmlns:a="http://schemas.openxmlformats.org/drawingml/2006/main" xmlns:r="http://schemas.openxmlformats.org/officeDocument/2006/relationships" xmlns:p="http://schemas.openxmlformats.org/presentationml/2006/main">
+  <p:cSld>
+    <p:spTree>
+      <p:nvGrpSpPr>
+        <p:cNvPr id="1" name=""/>
+        <p:cNvGrpSpPr/>
+        <p:nvPr/>
+      </p:nvGrpSpPr>
+      <p:grpSpPr>
+        <a:xfrm>
+          <a:off x="0" y="0"/>
+          <a:ext cx="0" cy="0"/>
+          <a:chOff x="0" y="0"/>
+          <a:chExt cx="0" cy="0"/>
+        </a:xfrm>
+      </p:grpSpPr>
+      <p:sp>
+        <p:nvSpPr>
+          <p:cNvPr id="4" name="Date Placeholder 3">
+            <a:extLst>
+              <a:ext uri="{FF2B5EF4-FFF2-40B4-BE49-F238E27FC236}">
+                <a16:creationId xmlns:a16="http://schemas.microsoft.com/office/drawing/2014/main" id="{2A7723F3-EFFE-E6A1-A349-3D286DE8F183}"/>
+              </a:ext>
+            </a:extLst>
+          </p:cNvPr>
+          <p:cNvSpPr>
+            <a:spLocks noGrp="1"/>
+          </p:cNvSpPr>
+          <p:nvPr>
+            <p:ph type="dt" sz="half" idx="10"/>
+          </p:nvPr>
+        </p:nvSpPr>
+        <p:spPr/>
+        <p:txBody>
+          <a:bodyPr/>
+          <a:lstStyle/>
+          <a:p>
+            <a:r>
+              <a:rPr lang="en-US"/>
+              <a:t>10/05/2024</a:t>
+            </a:r>
+            <a:endParaRPr lang="en-US" dirty="0"/>
+          </a:p>
+        </p:txBody>
+      </p:sp>
+      <p:sp>
+        <p:nvSpPr>
+          <p:cNvPr id="5" name="Footer Placeholder 4">
+            <a:extLst>
+              <a:ext uri="{FF2B5EF4-FFF2-40B4-BE49-F238E27FC236}">
+                <a16:creationId xmlns:a16="http://schemas.microsoft.com/office/drawing/2014/main" id="{1F111E65-E056-A402-F42A-3B92008E6D67}"/>
+              </a:ext>
+            </a:extLst>
+          </p:cNvPr>
+          <p:cNvSpPr>
+            <a:spLocks noGrp="1"/>
+          </p:cNvSpPr>
+          <p:nvPr>
+            <p:ph type="ftr" sz="quarter" idx="11"/>
+          </p:nvPr>
+        </p:nvSpPr>
+        <p:spPr/>
+        <p:txBody>
+          <a:bodyPr/>
+          <a:lstStyle/>
+          <a:p>
+            <a:r>
+              <a:rPr lang="en-US"/>
+              <a:t>GSI</a:t>
+            </a:r>
+            <a:endParaRPr lang="en-US" dirty="0"/>
+          </a:p>
+        </p:txBody>
+      </p:sp>
+      <p:sp>
+        <p:nvSpPr>
+          <p:cNvPr id="6" name="Slide Number Placeholder 5">
+            <a:extLst>
+              <a:ext uri="{FF2B5EF4-FFF2-40B4-BE49-F238E27FC236}">
+                <a16:creationId xmlns:a16="http://schemas.microsoft.com/office/drawing/2014/main" id="{4417CB90-93E4-37A4-6D7D-90B6BF2E34D1}"/>
+              </a:ext>
+            </a:extLst>
+          </p:cNvPr>
+          <p:cNvSpPr>
+            <a:spLocks noGrp="1"/>
+          </p:cNvSpPr>
+          <p:nvPr>
+            <p:ph type="sldNum" sz="quarter" idx="12"/>
+          </p:nvPr>
+        </p:nvSpPr>
+        <p:spPr/>
+        <p:txBody>
+          <a:bodyPr/>
+          <a:lstStyle/>
+          <a:p>
+            <a:fld id="{2FB79C59-F32A-44C5-BD88-D6F83C6AD380}" type="slidenum">
+              <a:rPr lang="en-US" smtClean="0"/>
+              <a:t>18</a:t>
+            </a:fld>
+            <a:endParaRPr lang="en-US"/>
+          </a:p>
+        </p:txBody>
+      </p:sp>
+      <p:sp>
+        <p:nvSpPr>
+          <p:cNvPr id="3" name="Content Placeholder 2">
+            <a:extLst>
+              <a:ext uri="{FF2B5EF4-FFF2-40B4-BE49-F238E27FC236}">
+                <a16:creationId xmlns:a16="http://schemas.microsoft.com/office/drawing/2014/main" id="{F04220F3-12EB-B74D-81BE-9A26BB0EBCA7}"/>
+              </a:ext>
+            </a:extLst>
+          </p:cNvPr>
+          <p:cNvSpPr>
+            <a:spLocks noGrp="1"/>
+          </p:cNvSpPr>
+          <p:nvPr>
+            <p:ph idx="1"/>
+          </p:nvPr>
+        </p:nvSpPr>
+        <p:spPr/>
+        <p:txBody>
+          <a:bodyPr/>
+          <a:lstStyle/>
+          <a:p>
+            <a:pPr marL="0" indent="0">
+              <a:buNone/>
+            </a:pPr>
+            <a:r>
+              <a:rPr lang="en-US" sz="2800" b="1" dirty="0"/>
+              <a:t>Participation in Professional Events</a:t>
+            </a:r>
+          </a:p>
+          <a:p>
+            <a:pPr marL="0" indent="0">
+              <a:buNone/>
+            </a:pPr>
+            <a:endParaRPr lang="en-US" sz="2800" b="1"/>
+          </a:p>
+          <a:p>
+            <a:r>
+              <a:rPr lang="en-US"/>
+              <a:t>Discussing regularly to other software developers and exchanging experiences.</a:t>
+            </a:r>
+            <a:endParaRPr lang="en-US" dirty="0"/>
+          </a:p>
+          <a:p>
+            <a:r>
+              <a:rPr lang="en-US" b="0" i="0">
+                <a:solidFill>
+                  <a:srgbClr val="4B4F58"/>
+                </a:solidFill>
+                <a:effectLst/>
+                <a:highlight>
+                  <a:srgbClr val="FFFFFF"/>
+                </a:highlight>
+                <a:latin typeface="-apple-system"/>
+              </a:rPr>
+              <a:t> </a:t>
+            </a:r>
+            <a:r>
+              <a:rPr lang="en-US"/>
+              <a:t>Attending conferences, workshops, meetups, or other gatherings related to your professional field.</a:t>
+            </a:r>
+          </a:p>
+          <a:p>
+            <a:r>
+              <a:rPr lang="en-US"/>
+              <a:t>Learning, Networking, Skill Development, Staying Informed</a:t>
+            </a:r>
+            <a:endParaRPr lang="en-US" dirty="0"/>
+          </a:p>
+        </p:txBody>
+      </p:sp>
+      <p:sp>
+        <p:nvSpPr>
+          <p:cNvPr id="9" name="Title 1">
+            <a:extLst>
+              <a:ext uri="{FF2B5EF4-FFF2-40B4-BE49-F238E27FC236}">
+                <a16:creationId xmlns:a16="http://schemas.microsoft.com/office/drawing/2014/main" id="{BF0B79C9-5315-2D6B-FBF4-6F562E00B215}"/>
+              </a:ext>
+            </a:extLst>
+          </p:cNvPr>
+          <p:cNvSpPr>
+            <a:spLocks noGrp="1"/>
+          </p:cNvSpPr>
+          <p:nvPr>
+            <p:ph type="title"/>
+          </p:nvPr>
+        </p:nvSpPr>
+        <p:spPr>
+          <a:xfrm>
+            <a:off x="838200" y="320675"/>
+            <a:ext cx="10934700" cy="1325563"/>
+          </a:xfrm>
+        </p:spPr>
+        <p:txBody>
+          <a:bodyPr>
+            <a:normAutofit/>
+          </a:bodyPr>
+          <a:lstStyle/>
+          <a:p>
+            <a:r>
+              <a:rPr lang="en-US" sz="4000"/>
+              <a:t>Clean Code Yellow Grade Principles</a:t>
+            </a:r>
+          </a:p>
+        </p:txBody>
+      </p:sp>
+    </p:spTree>
+    <p:extLst>
+      <p:ext uri="{BB962C8B-B14F-4D97-AF65-F5344CB8AC3E}">
+        <p14:creationId xmlns:p14="http://schemas.microsoft.com/office/powerpoint/2010/main" val="1930022487"/>
+      </p:ext>
+    </p:extLst>
+  </p:cSld>
+  <p:clrMapOvr>
+    <a:masterClrMapping/>
+  </p:clrMapOvr>
+</p:sld>
+</file>
+
+<file path=ppt/slides/slide19.xml><?xml version="1.0" encoding="utf-8"?>
+<p:sld xmlns:a="http://schemas.openxmlformats.org/drawingml/2006/main" xmlns:r="http://schemas.openxmlformats.org/officeDocument/2006/relationships" xmlns:p="http://schemas.openxmlformats.org/presentationml/2006/main">
+  <p:cSld>
+    <p:spTree>
+      <p:nvGrpSpPr>
+        <p:cNvPr id="1" name=""/>
+        <p:cNvGrpSpPr/>
+        <p:nvPr/>
+      </p:nvGrpSpPr>
+      <p:grpSpPr>
+        <a:xfrm>
+          <a:off x="0" y="0"/>
+          <a:ext cx="0" cy="0"/>
+          <a:chOff x="0" y="0"/>
+          <a:chExt cx="0" cy="0"/>
+        </a:xfrm>
+      </p:grpSpPr>
+      <p:sp>
+        <p:nvSpPr>
+          <p:cNvPr id="4" name="Date Placeholder 3">
+            <a:extLst>
+              <a:ext uri="{FF2B5EF4-FFF2-40B4-BE49-F238E27FC236}">
+                <a16:creationId xmlns:a16="http://schemas.microsoft.com/office/drawing/2014/main" id="{2A7723F3-EFFE-E6A1-A349-3D286DE8F183}"/>
+              </a:ext>
+            </a:extLst>
+          </p:cNvPr>
+          <p:cNvSpPr>
+            <a:spLocks noGrp="1"/>
+          </p:cNvSpPr>
+          <p:nvPr>
+            <p:ph type="dt" sz="half" idx="10"/>
+          </p:nvPr>
+        </p:nvSpPr>
+        <p:spPr/>
+        <p:txBody>
+          <a:bodyPr/>
+          <a:lstStyle/>
+          <a:p>
+            <a:r>
+              <a:rPr lang="en-US"/>
+              <a:t>10/05/2024</a:t>
+            </a:r>
+            <a:endParaRPr lang="en-US" dirty="0"/>
+          </a:p>
+        </p:txBody>
+      </p:sp>
+      <p:sp>
+        <p:nvSpPr>
+          <p:cNvPr id="5" name="Footer Placeholder 4">
+            <a:extLst>
+              <a:ext uri="{FF2B5EF4-FFF2-40B4-BE49-F238E27FC236}">
+                <a16:creationId xmlns:a16="http://schemas.microsoft.com/office/drawing/2014/main" id="{1F111E65-E056-A402-F42A-3B92008E6D67}"/>
+              </a:ext>
+            </a:extLst>
+          </p:cNvPr>
+          <p:cNvSpPr>
+            <a:spLocks noGrp="1"/>
+          </p:cNvSpPr>
+          <p:nvPr>
+            <p:ph type="ftr" sz="quarter" idx="11"/>
+          </p:nvPr>
+        </p:nvSpPr>
+        <p:spPr/>
+        <p:txBody>
+          <a:bodyPr/>
+          <a:lstStyle/>
+          <a:p>
+            <a:r>
+              <a:rPr lang="en-US"/>
+              <a:t>GSI</a:t>
+            </a:r>
+            <a:endParaRPr lang="en-US" dirty="0"/>
+          </a:p>
+        </p:txBody>
+      </p:sp>
+      <p:sp>
+        <p:nvSpPr>
+          <p:cNvPr id="6" name="Slide Number Placeholder 5">
+            <a:extLst>
+              <a:ext uri="{FF2B5EF4-FFF2-40B4-BE49-F238E27FC236}">
+                <a16:creationId xmlns:a16="http://schemas.microsoft.com/office/drawing/2014/main" id="{4417CB90-93E4-37A4-6D7D-90B6BF2E34D1}"/>
+              </a:ext>
+            </a:extLst>
+          </p:cNvPr>
+          <p:cNvSpPr>
+            <a:spLocks noGrp="1"/>
+          </p:cNvSpPr>
+          <p:nvPr>
+            <p:ph type="sldNum" sz="quarter" idx="12"/>
+          </p:nvPr>
+        </p:nvSpPr>
+        <p:spPr/>
+        <p:txBody>
+          <a:bodyPr/>
+          <a:lstStyle/>
+          <a:p>
+            <a:fld id="{2FB79C59-F32A-44C5-BD88-D6F83C6AD380}" type="slidenum">
+              <a:rPr lang="en-US" smtClean="0"/>
+              <a:t>19</a:t>
+            </a:fld>
+            <a:endParaRPr lang="en-US"/>
+          </a:p>
+        </p:txBody>
+      </p:sp>
+      <p:sp>
+        <p:nvSpPr>
+          <p:cNvPr id="3" name="Content Placeholder 2">
+            <a:extLst>
+              <a:ext uri="{FF2B5EF4-FFF2-40B4-BE49-F238E27FC236}">
+                <a16:creationId xmlns:a16="http://schemas.microsoft.com/office/drawing/2014/main" id="{F04220F3-12EB-B74D-81BE-9A26BB0EBCA7}"/>
+              </a:ext>
+            </a:extLst>
+          </p:cNvPr>
+          <p:cNvSpPr>
+            <a:spLocks noGrp="1"/>
+          </p:cNvSpPr>
+          <p:nvPr>
+            <p:ph idx="1"/>
+          </p:nvPr>
+        </p:nvSpPr>
+        <p:spPr/>
+        <p:txBody>
+          <a:bodyPr>
+            <a:normAutofit/>
+          </a:bodyPr>
+          <a:lstStyle/>
+          <a:p>
+            <a:pPr marL="0" indent="0">
+              <a:buNone/>
+            </a:pPr>
+            <a:r>
+              <a:rPr lang="en-US" sz="2800" b="1" dirty="0"/>
+              <a:t>Complex </a:t>
+            </a:r>
+            <a:r>
+              <a:rPr lang="en-US" sz="2800" b="1" dirty="0" err="1"/>
+              <a:t>Refactorings</a:t>
+            </a:r>
+            <a:endParaRPr lang="en-US" sz="2800" b="1" dirty="0"/>
+          </a:p>
+          <a:p>
+            <a:r>
+              <a:rPr lang="en-US"/>
+              <a:t>The process of restructuring and modifying existing code to improve its overall design, maintainability, and performance</a:t>
+            </a:r>
+            <a:endParaRPr lang="en-US" sz="2800" dirty="0"/>
+          </a:p>
+          <a:p>
+            <a:r>
+              <a:rPr lang="en-US" sz="2800"/>
+              <a:t>Benefits:</a:t>
+            </a:r>
+          </a:p>
+          <a:p>
+            <a:pPr lvl="1"/>
+            <a:r>
+              <a:rPr lang="en-US"/>
+              <a:t>Improved saintainability</a:t>
+            </a:r>
+          </a:p>
+          <a:p>
+            <a:pPr lvl="1"/>
+            <a:r>
+              <a:rPr lang="en-US"/>
+              <a:t>Enhanced scalability</a:t>
+            </a:r>
+            <a:endParaRPr lang="en-US" dirty="0"/>
+          </a:p>
+        </p:txBody>
+      </p:sp>
+      <p:sp>
+        <p:nvSpPr>
+          <p:cNvPr id="9" name="Title 1">
+            <a:extLst>
+              <a:ext uri="{FF2B5EF4-FFF2-40B4-BE49-F238E27FC236}">
+                <a16:creationId xmlns:a16="http://schemas.microsoft.com/office/drawing/2014/main" id="{BF0B79C9-5315-2D6B-FBF4-6F562E00B215}"/>
+              </a:ext>
+            </a:extLst>
+          </p:cNvPr>
+          <p:cNvSpPr>
+            <a:spLocks noGrp="1"/>
+          </p:cNvSpPr>
+          <p:nvPr>
+            <p:ph type="title"/>
+          </p:nvPr>
+        </p:nvSpPr>
+        <p:spPr>
+          <a:xfrm>
+            <a:off x="838200" y="320675"/>
+            <a:ext cx="10934700" cy="1325563"/>
+          </a:xfrm>
+        </p:spPr>
+        <p:txBody>
+          <a:bodyPr>
+            <a:normAutofit/>
+          </a:bodyPr>
+          <a:lstStyle/>
+          <a:p>
+            <a:r>
+              <a:rPr lang="en-US" sz="4000"/>
+              <a:t>Clean Code Yellow Grade Principles</a:t>
+            </a:r>
+          </a:p>
+        </p:txBody>
+      </p:sp>
+    </p:spTree>
+    <p:extLst>
+      <p:ext uri="{BB962C8B-B14F-4D97-AF65-F5344CB8AC3E}">
+        <p14:creationId xmlns:p14="http://schemas.microsoft.com/office/powerpoint/2010/main" val="3472894490"/>
       </p:ext>
     </p:extLst>
   </p:cSld>
@@ -6321,7 +6961,7 @@
         <p:spPr>
           <a:xfrm>
             <a:off x="4817060" y="1690688"/>
-            <a:ext cx="2557879" cy="4472450"/>
+            <a:ext cx="2959779" cy="4472450"/>
           </a:xfrm>
         </p:spPr>
         <p:txBody>
@@ -6339,7 +6979,7 @@
             </a:pPr>
             <a:r>
               <a:rPr lang="en-US" sz="2800" b="1"/>
-              <a:t>Yellow</a:t>
+              <a:t>Yellow Grade</a:t>
             </a:r>
           </a:p>
           <a:p>
@@ -6476,6 +7116,157 @@
     <p:extLst>
       <p:ext uri="{BB962C8B-B14F-4D97-AF65-F5344CB8AC3E}">
         <p14:creationId xmlns:p14="http://schemas.microsoft.com/office/powerpoint/2010/main" val="1270650884"/>
+      </p:ext>
+    </p:extLst>
+  </p:cSld>
+  <p:clrMapOvr>
+    <a:masterClrMapping/>
+  </p:clrMapOvr>
+</p:sld>
+</file>
+
+<file path=ppt/slides/slide20.xml><?xml version="1.0" encoding="utf-8"?>
+<p:sld xmlns:a="http://schemas.openxmlformats.org/drawingml/2006/main" xmlns:r="http://schemas.openxmlformats.org/officeDocument/2006/relationships" xmlns:p="http://schemas.openxmlformats.org/presentationml/2006/main">
+  <p:cSld>
+    <p:spTree>
+      <p:nvGrpSpPr>
+        <p:cNvPr id="1" name=""/>
+        <p:cNvGrpSpPr/>
+        <p:nvPr/>
+      </p:nvGrpSpPr>
+      <p:grpSpPr>
+        <a:xfrm>
+          <a:off x="0" y="0"/>
+          <a:ext cx="0" cy="0"/>
+          <a:chOff x="0" y="0"/>
+          <a:chExt cx="0" cy="0"/>
+        </a:xfrm>
+      </p:grpSpPr>
+      <p:sp>
+        <p:nvSpPr>
+          <p:cNvPr id="2" name="Title 1">
+            <a:extLst>
+              <a:ext uri="{FF2B5EF4-FFF2-40B4-BE49-F238E27FC236}">
+                <a16:creationId xmlns:a16="http://schemas.microsoft.com/office/drawing/2014/main" id="{727D4E91-3127-5564-D021-AF651A480EA6}"/>
+              </a:ext>
+            </a:extLst>
+          </p:cNvPr>
+          <p:cNvSpPr>
+            <a:spLocks noGrp="1"/>
+          </p:cNvSpPr>
+          <p:nvPr>
+            <p:ph type="title"/>
+          </p:nvPr>
+        </p:nvSpPr>
+        <p:spPr>
+          <a:xfrm>
+            <a:off x="838200" y="2766218"/>
+            <a:ext cx="10515600" cy="1325563"/>
+          </a:xfrm>
+        </p:spPr>
+        <p:txBody>
+          <a:bodyPr/>
+          <a:lstStyle/>
+          <a:p>
+            <a:pPr algn="ctr"/>
+            <a:r>
+              <a:rPr lang="en-US" dirty="0"/>
+              <a:t>Answer the questions</a:t>
+            </a:r>
+          </a:p>
+        </p:txBody>
+      </p:sp>
+      <p:sp>
+        <p:nvSpPr>
+          <p:cNvPr id="4" name="Date Placeholder 3">
+            <a:extLst>
+              <a:ext uri="{FF2B5EF4-FFF2-40B4-BE49-F238E27FC236}">
+                <a16:creationId xmlns:a16="http://schemas.microsoft.com/office/drawing/2014/main" id="{E7A36B01-0E5B-6A18-18CB-4618F60F150A}"/>
+              </a:ext>
+            </a:extLst>
+          </p:cNvPr>
+          <p:cNvSpPr>
+            <a:spLocks noGrp="1"/>
+          </p:cNvSpPr>
+          <p:nvPr>
+            <p:ph type="dt" sz="half" idx="10"/>
+          </p:nvPr>
+        </p:nvSpPr>
+        <p:spPr/>
+        <p:txBody>
+          <a:bodyPr/>
+          <a:lstStyle/>
+          <a:p>
+            <a:r>
+              <a:rPr lang="en-US"/>
+              <a:t>10/05/2024</a:t>
+            </a:r>
+            <a:endParaRPr lang="en-US" dirty="0"/>
+          </a:p>
+        </p:txBody>
+      </p:sp>
+      <p:sp>
+        <p:nvSpPr>
+          <p:cNvPr id="5" name="Footer Placeholder 4">
+            <a:extLst>
+              <a:ext uri="{FF2B5EF4-FFF2-40B4-BE49-F238E27FC236}">
+                <a16:creationId xmlns:a16="http://schemas.microsoft.com/office/drawing/2014/main" id="{20C896B9-583B-690B-D72F-E400BFBAD7D4}"/>
+              </a:ext>
+            </a:extLst>
+          </p:cNvPr>
+          <p:cNvSpPr>
+            <a:spLocks noGrp="1"/>
+          </p:cNvSpPr>
+          <p:nvPr>
+            <p:ph type="ftr" sz="quarter" idx="11"/>
+          </p:nvPr>
+        </p:nvSpPr>
+        <p:spPr/>
+        <p:txBody>
+          <a:bodyPr/>
+          <a:lstStyle/>
+          <a:p>
+            <a:r>
+              <a:rPr lang="en-US"/>
+              <a:t>GSI</a:t>
+            </a:r>
+            <a:endParaRPr lang="en-US" dirty="0"/>
+          </a:p>
+        </p:txBody>
+      </p:sp>
+      <p:sp>
+        <p:nvSpPr>
+          <p:cNvPr id="6" name="Slide Number Placeholder 5">
+            <a:extLst>
+              <a:ext uri="{FF2B5EF4-FFF2-40B4-BE49-F238E27FC236}">
+                <a16:creationId xmlns:a16="http://schemas.microsoft.com/office/drawing/2014/main" id="{E33F870A-03E6-2009-4646-281250011AAA}"/>
+              </a:ext>
+            </a:extLst>
+          </p:cNvPr>
+          <p:cNvSpPr>
+            <a:spLocks noGrp="1"/>
+          </p:cNvSpPr>
+          <p:nvPr>
+            <p:ph type="sldNum" sz="quarter" idx="12"/>
+          </p:nvPr>
+        </p:nvSpPr>
+        <p:spPr/>
+        <p:txBody>
+          <a:bodyPr/>
+          <a:lstStyle/>
+          <a:p>
+            <a:fld id="{2FB79C59-F32A-44C5-BD88-D6F83C6AD380}" type="slidenum">
+              <a:rPr lang="en-US" smtClean="0"/>
+              <a:t>20</a:t>
+            </a:fld>
+            <a:endParaRPr lang="en-US"/>
+          </a:p>
+        </p:txBody>
+      </p:sp>
+    </p:spTree>
+    <p:extLst>
+      <p:ext uri="{BB962C8B-B14F-4D97-AF65-F5344CB8AC3E}">
+        <p14:creationId xmlns:p14="http://schemas.microsoft.com/office/powerpoint/2010/main" val="1243198624"/>
       </p:ext>
     </p:extLst>
   </p:cSld>
@@ -6633,8 +7424,8 @@
         </p:nvSpPr>
         <p:spPr>
           <a:xfrm>
-            <a:off x="838200" y="2076831"/>
-            <a:ext cx="10515600" cy="2426305"/>
+            <a:off x="838200" y="2008098"/>
+            <a:ext cx="10515600" cy="4308359"/>
           </a:xfrm>
           <a:prstGeom prst="rect">
             <a:avLst/>
@@ -6647,13 +7438,15 @@
           </a:bodyPr>
           <a:lstStyle/>
           <a:p>
-            <a:pPr lvl="1" defTabSz="914400">
+            <a:pPr marL="914400" lvl="1" indent="-457200" defTabSz="914400">
               <a:lnSpc>
                 <a:spcPct val="90000"/>
               </a:lnSpc>
               <a:spcBef>
                 <a:spcPts val="500"/>
               </a:spcBef>
+              <a:buFont typeface="Arial" panose="020B0604020202020204" pitchFamily="34" charset="0"/>
+              <a:buChar char="•"/>
             </a:pPr>
             <a:r>
               <a:rPr lang="en-US" sz="3000" dirty="0" err="1"/>
@@ -6666,70 +7459,119 @@
             <a:endParaRPr lang="vi-VN" sz="3000" dirty="0"/>
           </a:p>
           <a:p>
-            <a:pPr lvl="1" defTabSz="914400">
+            <a:pPr marL="914400" lvl="1" indent="-457200" defTabSz="914400">
               <a:lnSpc>
                 <a:spcPct val="90000"/>
               </a:lnSpc>
               <a:spcBef>
                 <a:spcPts val="500"/>
               </a:spcBef>
+              <a:buFont typeface="Arial" panose="020B0604020202020204" pitchFamily="34" charset="0"/>
+              <a:buChar char="•"/>
             </a:pPr>
             <a:r>
-              <a:rPr lang="en-US" sz="3000" dirty="0"/>
-              <a:t>Includes principle of</a:t>
-            </a:r>
-            <a:r>
-              <a:rPr lang="vi-VN" sz="3000" dirty="0"/>
+              <a:rPr lang="en-US" sz="3000"/>
+              <a:t>Include SOLID principle and principle of</a:t>
+            </a:r>
+            <a:r>
+              <a:rPr lang="vi-VN" sz="3000"/>
               <a:t> object orientation</a:t>
             </a:r>
-            <a:r>
-              <a:rPr lang="en-US" sz="3000" dirty="0"/>
-              <a:t> </a:t>
-            </a:r>
-            <a:r>
-              <a:rPr lang="vi-VN" sz="3000" dirty="0"/>
-              <a:t>(encapsulation)</a:t>
-            </a:r>
-          </a:p>
-          <a:p>
-            <a:pPr lvl="1" defTabSz="914400">
+            <a:endParaRPr lang="en-US" sz="3000" dirty="0"/>
+          </a:p>
+          <a:p>
+            <a:pPr marL="914400" lvl="1" indent="-457200" defTabSz="914400">
               <a:lnSpc>
                 <a:spcPct val="90000"/>
               </a:lnSpc>
               <a:spcBef>
                 <a:spcPts val="500"/>
               </a:spcBef>
+              <a:buFont typeface="Arial" panose="020B0604020202020204" pitchFamily="34" charset="0"/>
+              <a:buChar char="•"/>
             </a:pPr>
-            <a:endParaRPr lang="vi-VN" sz="3000" dirty="0"/>
-          </a:p>
-          <a:p>
-            <a:pPr lvl="1" defTabSz="914400">
+            <a:r>
+              <a:rPr lang="en-US" sz="3000"/>
+              <a:t>Benefits:</a:t>
+            </a:r>
+          </a:p>
+          <a:p>
+            <a:pPr marL="1371600" lvl="2" indent="-457200" defTabSz="914400">
               <a:lnSpc>
                 <a:spcPct val="90000"/>
               </a:lnSpc>
               <a:spcBef>
                 <a:spcPts val="500"/>
               </a:spcBef>
+              <a:buFont typeface="Arial" panose="020B0604020202020204" pitchFamily="34" charset="0"/>
+              <a:buChar char="•"/>
             </a:pPr>
             <a:r>
-              <a:rPr lang="vi-VN" sz="3000" dirty="0"/>
-              <a:t>Making code more clean to unsderstand</a:t>
-            </a:r>
-          </a:p>
-          <a:p>
-            <a:pPr lvl="1" defTabSz="914400">
+              <a:rPr lang="en-US" sz="3000"/>
+              <a:t>Improve code readability, stability, flexibility</a:t>
+            </a:r>
+          </a:p>
+          <a:p>
+            <a:pPr marL="1371600" lvl="2" indent="-457200" defTabSz="914400">
               <a:lnSpc>
                 <a:spcPct val="90000"/>
               </a:lnSpc>
               <a:spcBef>
                 <a:spcPts val="500"/>
               </a:spcBef>
+              <a:buFont typeface="Arial" panose="020B0604020202020204" pitchFamily="34" charset="0"/>
+              <a:buChar char="•"/>
             </a:pPr>
             <a:r>
-              <a:rPr lang="vi-VN" sz="3000" dirty="0"/>
-              <a:t>Keeping the code stable</a:t>
-            </a:r>
-            <a:endParaRPr lang="en-US" sz="3000" dirty="0"/>
+              <a:rPr lang="en-US" sz="3000"/>
+              <a:t>Improve maintainability</a:t>
+            </a:r>
+          </a:p>
+          <a:p>
+            <a:pPr marL="1371600" lvl="2" indent="-457200" defTabSz="914400">
+              <a:lnSpc>
+                <a:spcPct val="90000"/>
+              </a:lnSpc>
+              <a:spcBef>
+                <a:spcPts val="500"/>
+              </a:spcBef>
+              <a:buFont typeface="Arial" panose="020B0604020202020204" pitchFamily="34" charset="0"/>
+              <a:buChar char="•"/>
+            </a:pPr>
+            <a:r>
+              <a:rPr lang="en-US" sz="3200"/>
+              <a:t>Stronger teamwork</a:t>
+            </a:r>
+            <a:r>
+              <a:rPr lang="en-US" sz="3000"/>
+              <a:t>, fast development</a:t>
+            </a:r>
+          </a:p>
+          <a:p>
+            <a:pPr marL="1371600" lvl="2" indent="-457200" defTabSz="914400">
+              <a:lnSpc>
+                <a:spcPct val="90000"/>
+              </a:lnSpc>
+              <a:spcBef>
+                <a:spcPts val="500"/>
+              </a:spcBef>
+              <a:buFont typeface="Arial" panose="020B0604020202020204" pitchFamily="34" charset="0"/>
+              <a:buChar char="•"/>
+            </a:pPr>
+            <a:endParaRPr lang="en-US" sz="3000"/>
+          </a:p>
+          <a:p>
+            <a:pPr marL="1371600" lvl="2" indent="-457200" defTabSz="914400">
+              <a:lnSpc>
+                <a:spcPct val="90000"/>
+              </a:lnSpc>
+              <a:spcBef>
+                <a:spcPts val="500"/>
+              </a:spcBef>
+              <a:buFont typeface="Arial" panose="020B0604020202020204" pitchFamily="34" charset="0"/>
+              <a:buChar char="•"/>
+            </a:pPr>
+            <a:endParaRPr lang="en-US" sz="3000"/>
           </a:p>
         </p:txBody>
       </p:sp>
@@ -7070,8 +7912,8 @@
         </p:nvSpPr>
         <p:spPr>
           <a:xfrm>
-            <a:off x="838200" y="320675"/>
-            <a:ext cx="10934700" cy="1325563"/>
+            <a:off x="628650" y="0"/>
+            <a:ext cx="10934700" cy="1393792"/>
           </a:xfrm>
         </p:spPr>
         <p:txBody>
@@ -7190,7 +8032,12 @@
             <p:ph idx="1"/>
           </p:nvPr>
         </p:nvSpPr>
-        <p:spPr/>
+        <p:spPr>
+          <a:xfrm>
+            <a:off x="838200" y="1393793"/>
+            <a:ext cx="10515600" cy="4783169"/>
+          </a:xfrm>
+        </p:spPr>
         <p:txBody>
           <a:bodyPr/>
           <a:lstStyle/>
@@ -7244,8 +8091,8 @@
         </p:blipFill>
         <p:spPr bwMode="auto">
           <a:xfrm>
-            <a:off x="0" y="2605088"/>
-            <a:ext cx="12192000" cy="3571875"/>
+            <a:off x="0" y="2422687"/>
+            <a:ext cx="12192000" cy="3754276"/>
           </a:xfrm>
           <a:prstGeom prst="rect">
             <a:avLst/>
@@ -7294,10 +8141,177 @@
       </p:grpSpPr>
       <p:sp>
         <p:nvSpPr>
+          <p:cNvPr id="3" name="Content Placeholder 2">
+            <a:extLst>
+              <a:ext uri="{FF2B5EF4-FFF2-40B4-BE49-F238E27FC236}">
+                <a16:creationId xmlns:a16="http://schemas.microsoft.com/office/drawing/2014/main" id="{5F9C4F83-8EDC-A909-23DE-2C80DC636143}"/>
+              </a:ext>
+            </a:extLst>
+          </p:cNvPr>
+          <p:cNvSpPr>
+            <a:spLocks noGrp="1"/>
+          </p:cNvSpPr>
+          <p:nvPr>
+            <p:ph idx="1"/>
+          </p:nvPr>
+        </p:nvSpPr>
+        <p:spPr>
+          <a:xfrm>
+            <a:off x="838200" y="1393792"/>
+            <a:ext cx="10725150" cy="4783171"/>
+          </a:xfrm>
+        </p:spPr>
+        <p:txBody>
+          <a:bodyPr>
+            <a:normAutofit/>
+          </a:bodyPr>
+          <a:lstStyle/>
+          <a:p>
+            <a:pPr marL="0" indent="0">
+              <a:buNone/>
+            </a:pPr>
+            <a:r>
+              <a:rPr lang="en-US" sz="2800" b="1"/>
+              <a:t>Interface Segregation Principle (ISP)</a:t>
+            </a:r>
+          </a:p>
+          <a:p>
+            <a:pPr marL="0" indent="0">
+              <a:buNone/>
+            </a:pPr>
+            <a:endParaRPr lang="vi-VN" sz="2800" b="1"/>
+          </a:p>
+          <a:p>
+            <a:r>
+              <a:rPr lang="en-US"/>
+              <a:t>The I in SOLID principle</a:t>
+            </a:r>
+          </a:p>
+          <a:p>
+            <a:r>
+              <a:rPr lang="en-US"/>
+              <a:t>A client shall not depend on service details which the client does not use.</a:t>
+            </a:r>
+          </a:p>
+          <a:p>
+            <a:r>
+              <a:rPr lang="en-US"/>
+              <a:t>Benefits: </a:t>
+            </a:r>
+          </a:p>
+          <a:p>
+            <a:pPr lvl="1"/>
+            <a:r>
+              <a:rPr lang="en-US">
+                <a:solidFill>
+                  <a:srgbClr val="202124"/>
+                </a:solidFill>
+                <a:highlight>
+                  <a:srgbClr val="FFFFFF"/>
+                </a:highlight>
+                <a:latin typeface="Google Sans"/>
+              </a:rPr>
+              <a:t>C</a:t>
+            </a:r>
+            <a:r>
+              <a:rPr lang="en-US" b="0" i="0">
+                <a:solidFill>
+                  <a:srgbClr val="202124"/>
+                </a:solidFill>
+                <a:effectLst/>
+                <a:highlight>
+                  <a:srgbClr val="FFFFFF"/>
+                </a:highlight>
+                <a:latin typeface="Google Sans"/>
+              </a:rPr>
+              <a:t>ode more modular, reusable, and maintainable.</a:t>
+            </a:r>
+          </a:p>
+          <a:p>
+            <a:pPr lvl="1"/>
+            <a:r>
+              <a:rPr lang="en-US" b="0" i="0">
+                <a:solidFill>
+                  <a:srgbClr val="000000"/>
+                </a:solidFill>
+                <a:effectLst/>
+                <a:highlight>
+                  <a:srgbClr val="FFFFFF"/>
+                </a:highlight>
+                <a:latin typeface="Mulish"/>
+              </a:rPr>
+              <a:t>Reduces code complexity,</a:t>
+            </a:r>
+            <a:r>
+              <a:rPr lang="en-US" b="0" i="0">
+                <a:solidFill>
+                  <a:srgbClr val="7F7F7F"/>
+                </a:solidFill>
+                <a:effectLst/>
+                <a:highlight>
+                  <a:srgbClr val="FFFFFF"/>
+                </a:highlight>
+                <a:latin typeface="Mulish"/>
+              </a:rPr>
+              <a:t> </a:t>
+            </a:r>
+            <a:r>
+              <a:rPr lang="en-US" b="0" i="0">
+                <a:effectLst/>
+                <a:highlight>
+                  <a:srgbClr val="FFFFFF"/>
+                </a:highlight>
+                <a:latin typeface="Mulish"/>
+              </a:rPr>
+              <a:t>the amount of duplicate code</a:t>
+            </a:r>
+            <a:endParaRPr lang="en-US" b="0" i="0">
+              <a:solidFill>
+                <a:srgbClr val="7F7F7F"/>
+              </a:solidFill>
+              <a:effectLst/>
+              <a:highlight>
+                <a:srgbClr val="FFFFFF"/>
+              </a:highlight>
+              <a:latin typeface="Mulish"/>
+            </a:endParaRPr>
+          </a:p>
+          <a:p>
+            <a:pPr lvl="1"/>
+            <a:r>
+              <a:rPr lang="en-US">
+                <a:solidFill>
+                  <a:srgbClr val="000000"/>
+                </a:solidFill>
+                <a:highlight>
+                  <a:srgbClr val="FFFFFF"/>
+                </a:highlight>
+                <a:latin typeface="Mulish"/>
+              </a:rPr>
+              <a:t>Easier addition or removal of features</a:t>
+            </a:r>
+            <a:endParaRPr lang="en-US" sz="2800"/>
+          </a:p>
+          <a:p>
+            <a:pPr marL="457200" lvl="1" indent="0">
+              <a:buNone/>
+            </a:pPr>
+            <a:endParaRPr lang="en-US"/>
+          </a:p>
+          <a:p>
+            <a:pPr marL="0" indent="0">
+              <a:buNone/>
+            </a:pPr>
+            <a:endParaRPr lang="en-US"/>
+          </a:p>
+        </p:txBody>
+      </p:sp>
+      <p:sp>
+        <p:nvSpPr>
           <p:cNvPr id="4" name="Date Placeholder 3">
             <a:extLst>
               <a:ext uri="{FF2B5EF4-FFF2-40B4-BE49-F238E27FC236}">
-                <a16:creationId xmlns:a16="http://schemas.microsoft.com/office/drawing/2014/main" id="{2A7723F3-EFFE-E6A1-A349-3D286DE8F183}"/>
+                <a16:creationId xmlns:a16="http://schemas.microsoft.com/office/drawing/2014/main" id="{8E29EF69-A519-2B4A-3DA9-E2663782F028}"/>
               </a:ext>
             </a:extLst>
           </p:cNvPr>
@@ -7315,7 +8329,7 @@
           <a:p>
             <a:r>
               <a:rPr lang="en-US"/>
-              <a:t>10/05/2024</a:t>
+              <a:t>16/01/2024</a:t>
             </a:r>
             <a:endParaRPr lang="en-US" dirty="0"/>
           </a:p>
@@ -7326,7 +8340,7 @@
           <p:cNvPr id="5" name="Footer Placeholder 4">
             <a:extLst>
               <a:ext uri="{FF2B5EF4-FFF2-40B4-BE49-F238E27FC236}">
-                <a16:creationId xmlns:a16="http://schemas.microsoft.com/office/drawing/2014/main" id="{1F111E65-E056-A402-F42A-3B92008E6D67}"/>
+                <a16:creationId xmlns:a16="http://schemas.microsoft.com/office/drawing/2014/main" id="{CA497527-B516-BB3C-A321-B73F978E5156}"/>
               </a:ext>
             </a:extLst>
           </p:cNvPr>
@@ -7355,7 +8369,7 @@
           <p:cNvPr id="6" name="Slide Number Placeholder 5">
             <a:extLst>
               <a:ext uri="{FF2B5EF4-FFF2-40B4-BE49-F238E27FC236}">
-                <a16:creationId xmlns:a16="http://schemas.microsoft.com/office/drawing/2014/main" id="{4417CB90-93E4-37A4-6D7D-90B6BF2E34D1}"/>
+                <a16:creationId xmlns:a16="http://schemas.microsoft.com/office/drawing/2014/main" id="{DCD2CFBF-274D-1CE7-D695-46D38B803E92}"/>
               </a:ext>
             </a:extLst>
           </p:cNvPr>
@@ -7381,24 +8395,176 @@
       </p:sp>
       <p:sp>
         <p:nvSpPr>
-          <p:cNvPr id="3" name="Content Placeholder 2">
-            <a:extLst>
-              <a:ext uri="{FF2B5EF4-FFF2-40B4-BE49-F238E27FC236}">
-                <a16:creationId xmlns:a16="http://schemas.microsoft.com/office/drawing/2014/main" id="{F04220F3-12EB-B74D-81BE-9A26BB0EBCA7}"/>
-              </a:ext>
-            </a:extLst>
-          </p:cNvPr>
-          <p:cNvSpPr>
-            <a:spLocks noGrp="1"/>
-          </p:cNvSpPr>
-          <p:nvPr>
-            <p:ph idx="1"/>
+          <p:cNvPr id="7" name="Title 1">
+            <a:extLst>
+              <a:ext uri="{FF2B5EF4-FFF2-40B4-BE49-F238E27FC236}">
+                <a16:creationId xmlns:a16="http://schemas.microsoft.com/office/drawing/2014/main" id="{37E55A8D-0947-DEC0-11C9-F728F89C2B9B}"/>
+              </a:ext>
+            </a:extLst>
+          </p:cNvPr>
+          <p:cNvSpPr>
+            <a:spLocks noGrp="1"/>
+          </p:cNvSpPr>
+          <p:nvPr>
+            <p:ph type="title"/>
           </p:nvPr>
         </p:nvSpPr>
         <p:spPr>
           <a:xfrm>
-            <a:off x="905522" y="1825625"/>
-            <a:ext cx="10448278" cy="4351338"/>
+            <a:off x="628650" y="0"/>
+            <a:ext cx="10934700" cy="1393792"/>
+          </a:xfrm>
+        </p:spPr>
+        <p:txBody>
+          <a:bodyPr>
+            <a:normAutofit/>
+          </a:bodyPr>
+          <a:lstStyle/>
+          <a:p>
+            <a:r>
+              <a:rPr lang="en-US" sz="4000"/>
+              <a:t>Clean Code Grade Yellow Principles</a:t>
+            </a:r>
+          </a:p>
+        </p:txBody>
+      </p:sp>
+    </p:spTree>
+    <p:extLst>
+      <p:ext uri="{BB962C8B-B14F-4D97-AF65-F5344CB8AC3E}">
+        <p14:creationId xmlns:p14="http://schemas.microsoft.com/office/powerpoint/2010/main" val="373703087"/>
+      </p:ext>
+    </p:extLst>
+  </p:cSld>
+  <p:clrMapOvr>
+    <a:masterClrMapping/>
+  </p:clrMapOvr>
+</p:sld>
+</file>
+
+<file path=ppt/slides/slide7.xml><?xml version="1.0" encoding="utf-8"?>
+<p:sld xmlns:a="http://schemas.openxmlformats.org/drawingml/2006/main" xmlns:r="http://schemas.openxmlformats.org/officeDocument/2006/relationships" xmlns:p="http://schemas.openxmlformats.org/presentationml/2006/main">
+  <p:cSld>
+    <p:spTree>
+      <p:nvGrpSpPr>
+        <p:cNvPr id="1" name=""/>
+        <p:cNvGrpSpPr/>
+        <p:nvPr/>
+      </p:nvGrpSpPr>
+      <p:grpSpPr>
+        <a:xfrm>
+          <a:off x="0" y="0"/>
+          <a:ext cx="0" cy="0"/>
+          <a:chOff x="0" y="0"/>
+          <a:chExt cx="0" cy="0"/>
+        </a:xfrm>
+      </p:grpSpPr>
+      <p:sp>
+        <p:nvSpPr>
+          <p:cNvPr id="4" name="Date Placeholder 3">
+            <a:extLst>
+              <a:ext uri="{FF2B5EF4-FFF2-40B4-BE49-F238E27FC236}">
+                <a16:creationId xmlns:a16="http://schemas.microsoft.com/office/drawing/2014/main" id="{2A7723F3-EFFE-E6A1-A349-3D286DE8F183}"/>
+              </a:ext>
+            </a:extLst>
+          </p:cNvPr>
+          <p:cNvSpPr>
+            <a:spLocks noGrp="1"/>
+          </p:cNvSpPr>
+          <p:nvPr>
+            <p:ph type="dt" sz="half" idx="10"/>
+          </p:nvPr>
+        </p:nvSpPr>
+        <p:spPr/>
+        <p:txBody>
+          <a:bodyPr/>
+          <a:lstStyle/>
+          <a:p>
+            <a:r>
+              <a:rPr lang="en-US"/>
+              <a:t>10/05/2024</a:t>
+            </a:r>
+            <a:endParaRPr lang="en-US" dirty="0"/>
+          </a:p>
+        </p:txBody>
+      </p:sp>
+      <p:sp>
+        <p:nvSpPr>
+          <p:cNvPr id="5" name="Footer Placeholder 4">
+            <a:extLst>
+              <a:ext uri="{FF2B5EF4-FFF2-40B4-BE49-F238E27FC236}">
+                <a16:creationId xmlns:a16="http://schemas.microsoft.com/office/drawing/2014/main" id="{1F111E65-E056-A402-F42A-3B92008E6D67}"/>
+              </a:ext>
+            </a:extLst>
+          </p:cNvPr>
+          <p:cNvSpPr>
+            <a:spLocks noGrp="1"/>
+          </p:cNvSpPr>
+          <p:nvPr>
+            <p:ph type="ftr" sz="quarter" idx="11"/>
+          </p:nvPr>
+        </p:nvSpPr>
+        <p:spPr/>
+        <p:txBody>
+          <a:bodyPr/>
+          <a:lstStyle/>
+          <a:p>
+            <a:r>
+              <a:rPr lang="en-US"/>
+              <a:t>GSI</a:t>
+            </a:r>
+            <a:endParaRPr lang="en-US" dirty="0"/>
+          </a:p>
+        </p:txBody>
+      </p:sp>
+      <p:sp>
+        <p:nvSpPr>
+          <p:cNvPr id="6" name="Slide Number Placeholder 5">
+            <a:extLst>
+              <a:ext uri="{FF2B5EF4-FFF2-40B4-BE49-F238E27FC236}">
+                <a16:creationId xmlns:a16="http://schemas.microsoft.com/office/drawing/2014/main" id="{4417CB90-93E4-37A4-6D7D-90B6BF2E34D1}"/>
+              </a:ext>
+            </a:extLst>
+          </p:cNvPr>
+          <p:cNvSpPr>
+            <a:spLocks noGrp="1"/>
+          </p:cNvSpPr>
+          <p:nvPr>
+            <p:ph type="sldNum" sz="quarter" idx="12"/>
+          </p:nvPr>
+        </p:nvSpPr>
+        <p:spPr/>
+        <p:txBody>
+          <a:bodyPr/>
+          <a:lstStyle/>
+          <a:p>
+            <a:fld id="{2FB79C59-F32A-44C5-BD88-D6F83C6AD380}" type="slidenum">
+              <a:rPr lang="en-US" smtClean="0"/>
+              <a:t>7</a:t>
+            </a:fld>
+            <a:endParaRPr lang="en-US"/>
+          </a:p>
+        </p:txBody>
+      </p:sp>
+      <p:sp>
+        <p:nvSpPr>
+          <p:cNvPr id="3" name="Content Placeholder 2">
+            <a:extLst>
+              <a:ext uri="{FF2B5EF4-FFF2-40B4-BE49-F238E27FC236}">
+                <a16:creationId xmlns:a16="http://schemas.microsoft.com/office/drawing/2014/main" id="{F04220F3-12EB-B74D-81BE-9A26BB0EBCA7}"/>
+              </a:ext>
+            </a:extLst>
+          </p:cNvPr>
+          <p:cNvSpPr>
+            <a:spLocks noGrp="1"/>
+          </p:cNvSpPr>
+          <p:nvPr>
+            <p:ph idx="1"/>
+          </p:nvPr>
+        </p:nvSpPr>
+        <p:spPr>
+          <a:xfrm>
+            <a:off x="905522" y="1393791"/>
+            <a:ext cx="10448278" cy="4783171"/>
           </a:xfrm>
         </p:spPr>
         <p:txBody>
@@ -7423,10 +8589,10 @@
       </p:sp>
       <p:sp>
         <p:nvSpPr>
-          <p:cNvPr id="10" name="Title 1">
-            <a:extLst>
-              <a:ext uri="{FF2B5EF4-FFF2-40B4-BE49-F238E27FC236}">
-                <a16:creationId xmlns:a16="http://schemas.microsoft.com/office/drawing/2014/main" id="{EAF5DA54-0E51-3D1A-E4E3-1F933F4A7D88}"/>
+          <p:cNvPr id="12" name="Title 1">
+            <a:extLst>
+              <a:ext uri="{FF2B5EF4-FFF2-40B4-BE49-F238E27FC236}">
+                <a16:creationId xmlns:a16="http://schemas.microsoft.com/office/drawing/2014/main" id="{97335FC6-6C92-84F7-5C6A-820B79485C52}"/>
               </a:ext>
             </a:extLst>
           </p:cNvPr>
@@ -7439,8 +8605,8 @@
         </p:nvSpPr>
         <p:spPr>
           <a:xfrm>
-            <a:off x="905522" y="320675"/>
-            <a:ext cx="10867378" cy="1325563"/>
+            <a:off x="628650" y="0"/>
+            <a:ext cx="10934700" cy="1393792"/>
           </a:xfrm>
         </p:spPr>
         <p:txBody>
@@ -7458,10 +8624,10 @@
       </p:sp>
       <p:pic>
         <p:nvPicPr>
-          <p:cNvPr id="2050" name="Picture 2" descr="Dependency Inversion Principle - Spring Framework Guru">
-            <a:extLst>
-              <a:ext uri="{FF2B5EF4-FFF2-40B4-BE49-F238E27FC236}">
-                <a16:creationId xmlns:a16="http://schemas.microsoft.com/office/drawing/2014/main" id="{FDDA2FF6-DE0A-54AA-30EE-286424EDB09D}"/>
+          <p:cNvPr id="1026" name="Picture 2" descr="Dependency inversion principle - Wikipedia">
+            <a:extLst>
+              <a:ext uri="{FF2B5EF4-FFF2-40B4-BE49-F238E27FC236}">
+                <a16:creationId xmlns:a16="http://schemas.microsoft.com/office/drawing/2014/main" id="{4A72886B-EC1A-EFF7-351E-95A04EE85872}"/>
               </a:ext>
             </a:extLst>
           </p:cNvPr>
@@ -7485,8 +8651,8 @@
         </p:blipFill>
         <p:spPr bwMode="auto">
           <a:xfrm>
-            <a:off x="1985962" y="2795588"/>
-            <a:ext cx="8220075" cy="3095625"/>
+            <a:off x="718134" y="2045482"/>
+            <a:ext cx="10755732" cy="4221174"/>
           </a:xfrm>
           <a:prstGeom prst="rect">
             <a:avLst/>
@@ -7516,242 +8682,6 @@
 </p:sld>
 </file>
 
-<file path=ppt/slides/slide7.xml><?xml version="1.0" encoding="utf-8"?>
-<p:sld xmlns:a="http://schemas.openxmlformats.org/drawingml/2006/main" xmlns:r="http://schemas.openxmlformats.org/officeDocument/2006/relationships" xmlns:p="http://schemas.openxmlformats.org/presentationml/2006/main">
-  <p:cSld>
-    <p:spTree>
-      <p:nvGrpSpPr>
-        <p:cNvPr id="1" name=""/>
-        <p:cNvGrpSpPr/>
-        <p:nvPr/>
-      </p:nvGrpSpPr>
-      <p:grpSpPr>
-        <a:xfrm>
-          <a:off x="0" y="0"/>
-          <a:ext cx="0" cy="0"/>
-          <a:chOff x="0" y="0"/>
-          <a:chExt cx="0" cy="0"/>
-        </a:xfrm>
-      </p:grpSpPr>
-      <p:sp>
-        <p:nvSpPr>
-          <p:cNvPr id="4" name="Date Placeholder 3">
-            <a:extLst>
-              <a:ext uri="{FF2B5EF4-FFF2-40B4-BE49-F238E27FC236}">
-                <a16:creationId xmlns:a16="http://schemas.microsoft.com/office/drawing/2014/main" id="{2A7723F3-EFFE-E6A1-A349-3D286DE8F183}"/>
-              </a:ext>
-            </a:extLst>
-          </p:cNvPr>
-          <p:cNvSpPr>
-            <a:spLocks noGrp="1"/>
-          </p:cNvSpPr>
-          <p:nvPr>
-            <p:ph type="dt" sz="half" idx="10"/>
-          </p:nvPr>
-        </p:nvSpPr>
-        <p:spPr/>
-        <p:txBody>
-          <a:bodyPr/>
-          <a:lstStyle/>
-          <a:p>
-            <a:r>
-              <a:rPr lang="en-US"/>
-              <a:t>10/05/2024</a:t>
-            </a:r>
-            <a:endParaRPr lang="en-US" dirty="0"/>
-          </a:p>
-        </p:txBody>
-      </p:sp>
-      <p:sp>
-        <p:nvSpPr>
-          <p:cNvPr id="5" name="Footer Placeholder 4">
-            <a:extLst>
-              <a:ext uri="{FF2B5EF4-FFF2-40B4-BE49-F238E27FC236}">
-                <a16:creationId xmlns:a16="http://schemas.microsoft.com/office/drawing/2014/main" id="{1F111E65-E056-A402-F42A-3B92008E6D67}"/>
-              </a:ext>
-            </a:extLst>
-          </p:cNvPr>
-          <p:cNvSpPr>
-            <a:spLocks noGrp="1"/>
-          </p:cNvSpPr>
-          <p:nvPr>
-            <p:ph type="ftr" sz="quarter" idx="11"/>
-          </p:nvPr>
-        </p:nvSpPr>
-        <p:spPr/>
-        <p:txBody>
-          <a:bodyPr/>
-          <a:lstStyle/>
-          <a:p>
-            <a:r>
-              <a:rPr lang="en-US"/>
-              <a:t>GSI</a:t>
-            </a:r>
-            <a:endParaRPr lang="en-US" dirty="0"/>
-          </a:p>
-        </p:txBody>
-      </p:sp>
-      <p:sp>
-        <p:nvSpPr>
-          <p:cNvPr id="6" name="Slide Number Placeholder 5">
-            <a:extLst>
-              <a:ext uri="{FF2B5EF4-FFF2-40B4-BE49-F238E27FC236}">
-                <a16:creationId xmlns:a16="http://schemas.microsoft.com/office/drawing/2014/main" id="{4417CB90-93E4-37A4-6D7D-90B6BF2E34D1}"/>
-              </a:ext>
-            </a:extLst>
-          </p:cNvPr>
-          <p:cNvSpPr>
-            <a:spLocks noGrp="1"/>
-          </p:cNvSpPr>
-          <p:nvPr>
-            <p:ph type="sldNum" sz="quarter" idx="12"/>
-          </p:nvPr>
-        </p:nvSpPr>
-        <p:spPr/>
-        <p:txBody>
-          <a:bodyPr/>
-          <a:lstStyle/>
-          <a:p>
-            <a:fld id="{2FB79C59-F32A-44C5-BD88-D6F83C6AD380}" type="slidenum">
-              <a:rPr lang="en-US" smtClean="0"/>
-              <a:t>7</a:t>
-            </a:fld>
-            <a:endParaRPr lang="en-US"/>
-          </a:p>
-        </p:txBody>
-      </p:sp>
-      <p:sp>
-        <p:nvSpPr>
-          <p:cNvPr id="3" name="Content Placeholder 2">
-            <a:extLst>
-              <a:ext uri="{FF2B5EF4-FFF2-40B4-BE49-F238E27FC236}">
-                <a16:creationId xmlns:a16="http://schemas.microsoft.com/office/drawing/2014/main" id="{F04220F3-12EB-B74D-81BE-9A26BB0EBCA7}"/>
-              </a:ext>
-            </a:extLst>
-          </p:cNvPr>
-          <p:cNvSpPr>
-            <a:spLocks noGrp="1"/>
-          </p:cNvSpPr>
-          <p:nvPr>
-            <p:ph idx="1"/>
-          </p:nvPr>
-        </p:nvSpPr>
-        <p:spPr/>
-        <p:txBody>
-          <a:bodyPr/>
-          <a:lstStyle/>
-          <a:p>
-            <a:pPr marL="0" indent="0">
-              <a:buNone/>
-            </a:pPr>
-            <a:r>
-              <a:rPr lang="en-US" sz="2800" b="1"/>
-              <a:t>Liskov Subsitution Principle</a:t>
-            </a:r>
-          </a:p>
-          <a:p>
-            <a:pPr marL="0" indent="0">
-              <a:buNone/>
-            </a:pPr>
-            <a:endParaRPr lang="en-US"/>
-          </a:p>
-        </p:txBody>
-      </p:sp>
-      <p:sp>
-        <p:nvSpPr>
-          <p:cNvPr id="9" name="Title 1">
-            <a:extLst>
-              <a:ext uri="{FF2B5EF4-FFF2-40B4-BE49-F238E27FC236}">
-                <a16:creationId xmlns:a16="http://schemas.microsoft.com/office/drawing/2014/main" id="{116430AD-A777-B757-E4C6-B62CAE81DC14}"/>
-              </a:ext>
-            </a:extLst>
-          </p:cNvPr>
-          <p:cNvSpPr>
-            <a:spLocks noGrp="1"/>
-          </p:cNvSpPr>
-          <p:nvPr>
-            <p:ph type="title"/>
-          </p:nvPr>
-        </p:nvSpPr>
-        <p:spPr>
-          <a:xfrm>
-            <a:off x="838200" y="320675"/>
-            <a:ext cx="10934700" cy="1325563"/>
-          </a:xfrm>
-        </p:spPr>
-        <p:txBody>
-          <a:bodyPr>
-            <a:normAutofit/>
-          </a:bodyPr>
-          <a:lstStyle/>
-          <a:p>
-            <a:r>
-              <a:rPr lang="en-US" sz="4000"/>
-              <a:t>Clean Code Grade Yellow Principles</a:t>
-            </a:r>
-          </a:p>
-        </p:txBody>
-      </p:sp>
-      <p:pic>
-        <p:nvPicPr>
-          <p:cNvPr id="3074" name="Picture 2" descr="Mastering SOLID Principles: A Comprehensive Guide for Software Engineers -  InRhythm">
-            <a:extLst>
-              <a:ext uri="{FF2B5EF4-FFF2-40B4-BE49-F238E27FC236}">
-                <a16:creationId xmlns:a16="http://schemas.microsoft.com/office/drawing/2014/main" id="{722F67D6-760A-223A-CB55-D32BDD05F265}"/>
-              </a:ext>
-            </a:extLst>
-          </p:cNvPr>
-          <p:cNvPicPr>
-            <a:picLocks noChangeAspect="1" noChangeArrowheads="1"/>
-          </p:cNvPicPr>
-          <p:nvPr/>
-        </p:nvPicPr>
-        <p:blipFill>
-          <a:blip r:embed="rId2">
-            <a:extLst>
-              <a:ext uri="{28A0092B-C50C-407E-A947-70E740481C1C}">
-                <a14:useLocalDpi xmlns:a14="http://schemas.microsoft.com/office/drawing/2010/main" val="0"/>
-              </a:ext>
-            </a:extLst>
-          </a:blip>
-          <a:srcRect/>
-          <a:stretch>
-            <a:fillRect/>
-          </a:stretch>
-        </p:blipFill>
-        <p:spPr bwMode="auto">
-          <a:xfrm>
-            <a:off x="4316895" y="2408986"/>
-            <a:ext cx="3977309" cy="3767977"/>
-          </a:xfrm>
-          <a:prstGeom prst="rect">
-            <a:avLst/>
-          </a:prstGeom>
-          <a:noFill/>
-          <a:extLst>
-            <a:ext uri="{909E8E84-426E-40DD-AFC4-6F175D3DCCD1}">
-              <a14:hiddenFill xmlns:a14="http://schemas.microsoft.com/office/drawing/2010/main">
-                <a:solidFill>
-                  <a:srgbClr val="FFFFFF"/>
-                </a:solidFill>
-              </a14:hiddenFill>
-            </a:ext>
-          </a:extLst>
-        </p:spPr>
-      </p:pic>
-    </p:spTree>
-    <p:extLst>
-      <p:ext uri="{BB962C8B-B14F-4D97-AF65-F5344CB8AC3E}">
-        <p14:creationId xmlns:p14="http://schemas.microsoft.com/office/powerpoint/2010/main" val="487391509"/>
-      </p:ext>
-    </p:extLst>
-  </p:cSld>
-  <p:clrMapOvr>
-    <a:masterClrMapping/>
-  </p:clrMapOvr>
-</p:sld>
-</file>
-
 <file path=ppt/slides/slide8.xml><?xml version="1.0" encoding="utf-8"?>
 <p:sld xmlns:a="http://schemas.openxmlformats.org/drawingml/2006/main" xmlns:r="http://schemas.openxmlformats.org/officeDocument/2006/relationships" xmlns:p="http://schemas.openxmlformats.org/presentationml/2006/main">
   <p:cSld>
@@ -7771,10 +8701,111 @@
       </p:grpSpPr>
       <p:sp>
         <p:nvSpPr>
+          <p:cNvPr id="3" name="Content Placeholder 2">
+            <a:extLst>
+              <a:ext uri="{FF2B5EF4-FFF2-40B4-BE49-F238E27FC236}">
+                <a16:creationId xmlns:a16="http://schemas.microsoft.com/office/drawing/2014/main" id="{85BE03AD-26E0-85F2-8FF4-0CE256F55CAB}"/>
+              </a:ext>
+            </a:extLst>
+          </p:cNvPr>
+          <p:cNvSpPr>
+            <a:spLocks noGrp="1"/>
+          </p:cNvSpPr>
+          <p:nvPr>
+            <p:ph idx="1"/>
+          </p:nvPr>
+        </p:nvSpPr>
+        <p:spPr>
+          <a:xfrm>
+            <a:off x="838200" y="1393792"/>
+            <a:ext cx="10515600" cy="4783171"/>
+          </a:xfrm>
+        </p:spPr>
+        <p:txBody>
+          <a:bodyPr>
+            <a:normAutofit lnSpcReduction="10000"/>
+          </a:bodyPr>
+          <a:lstStyle/>
+          <a:p>
+            <a:pPr marL="0" indent="0">
+              <a:buNone/>
+            </a:pPr>
+            <a:r>
+              <a:rPr lang="en-US" sz="2800" b="1"/>
+              <a:t>Dependency Inversion Principle (DIP)</a:t>
+            </a:r>
+          </a:p>
+          <a:p>
+            <a:endParaRPr lang="en-US"/>
+          </a:p>
+          <a:p>
+            <a:r>
+              <a:rPr lang="en-US"/>
+              <a:t>The D in SOLID principle</a:t>
+            </a:r>
+          </a:p>
+          <a:p>
+            <a:pPr fontAlgn="base"/>
+            <a:r>
+              <a:rPr lang="en-US"/>
+              <a:t>High-level classes must not depend on low-level classes but both from interfaces.</a:t>
+            </a:r>
+          </a:p>
+          <a:p>
+            <a:pPr fontAlgn="base"/>
+            <a:r>
+              <a:rPr lang="en-US"/>
+              <a:t>Interfaces must not depend on details but details on interfaces.</a:t>
+            </a:r>
+          </a:p>
+          <a:p>
+            <a:r>
+              <a:rPr lang="en-US" sz="2800"/>
+              <a:t>Benefits:</a:t>
+            </a:r>
+          </a:p>
+          <a:p>
+            <a:pPr lvl="1"/>
+            <a:r>
+              <a:rPr lang="en-US"/>
+              <a:t>Higher flexibility.</a:t>
+            </a:r>
+          </a:p>
+          <a:p>
+            <a:pPr lvl="1"/>
+            <a:r>
+              <a:rPr lang="en-US"/>
+              <a:t>Easier maintainability.</a:t>
+            </a:r>
+          </a:p>
+          <a:p>
+            <a:pPr lvl="1"/>
+            <a:r>
+              <a:rPr lang="en-US"/>
+              <a:t>Higher reusability.</a:t>
+            </a:r>
+          </a:p>
+          <a:p>
+            <a:pPr lvl="1"/>
+            <a:r>
+              <a:rPr lang="en-US"/>
+              <a:t>Higher modularity</a:t>
+            </a:r>
+          </a:p>
+          <a:p>
+            <a:pPr marL="0" indent="0">
+              <a:buNone/>
+            </a:pPr>
+            <a:endParaRPr lang="en-US"/>
+          </a:p>
+        </p:txBody>
+      </p:sp>
+      <p:sp>
+        <p:nvSpPr>
           <p:cNvPr id="4" name="Date Placeholder 3">
             <a:extLst>
               <a:ext uri="{FF2B5EF4-FFF2-40B4-BE49-F238E27FC236}">
-                <a16:creationId xmlns:a16="http://schemas.microsoft.com/office/drawing/2014/main" id="{2A7723F3-EFFE-E6A1-A349-3D286DE8F183}"/>
+                <a16:creationId xmlns:a16="http://schemas.microsoft.com/office/drawing/2014/main" id="{F4DF110B-2804-4242-C083-D9F52CD5414B}"/>
               </a:ext>
             </a:extLst>
           </p:cNvPr>
@@ -7792,7 +8823,7 @@
           <a:p>
             <a:r>
               <a:rPr lang="en-US"/>
-              <a:t>10/05/2024</a:t>
+              <a:t>16/01/2024</a:t>
             </a:r>
             <a:endParaRPr lang="en-US" dirty="0"/>
           </a:p>
@@ -7803,7 +8834,7 @@
           <p:cNvPr id="5" name="Footer Placeholder 4">
             <a:extLst>
               <a:ext uri="{FF2B5EF4-FFF2-40B4-BE49-F238E27FC236}">
-                <a16:creationId xmlns:a16="http://schemas.microsoft.com/office/drawing/2014/main" id="{1F111E65-E056-A402-F42A-3B92008E6D67}"/>
+                <a16:creationId xmlns:a16="http://schemas.microsoft.com/office/drawing/2014/main" id="{2A2545C2-C5DA-A867-888A-49CDFCA46931}"/>
               </a:ext>
             </a:extLst>
           </p:cNvPr>
@@ -7832,7 +8863,7 @@
           <p:cNvPr id="6" name="Slide Number Placeholder 5">
             <a:extLst>
               <a:ext uri="{FF2B5EF4-FFF2-40B4-BE49-F238E27FC236}">
-                <a16:creationId xmlns:a16="http://schemas.microsoft.com/office/drawing/2014/main" id="{4417CB90-93E4-37A4-6D7D-90B6BF2E34D1}"/>
+                <a16:creationId xmlns:a16="http://schemas.microsoft.com/office/drawing/2014/main" id="{6329BB85-9DA9-BCDB-9E29-41FB242C7758}"/>
               </a:ext>
             </a:extLst>
           </p:cNvPr>
@@ -7858,90 +8889,50 @@
       </p:sp>
       <p:sp>
         <p:nvSpPr>
-          <p:cNvPr id="3" name="Content Placeholder 2">
-            <a:extLst>
-              <a:ext uri="{FF2B5EF4-FFF2-40B4-BE49-F238E27FC236}">
-                <a16:creationId xmlns:a16="http://schemas.microsoft.com/office/drawing/2014/main" id="{F04220F3-12EB-B74D-81BE-9A26BB0EBCA7}"/>
-              </a:ext>
-            </a:extLst>
-          </p:cNvPr>
-          <p:cNvSpPr>
-            <a:spLocks noGrp="1"/>
-          </p:cNvSpPr>
-          <p:nvPr>
-            <p:ph idx="1"/>
-          </p:nvPr>
-        </p:nvSpPr>
-        <p:spPr/>
-        <p:txBody>
-          <a:bodyPr/>
-          <a:lstStyle/>
-          <a:p>
-            <a:pPr marL="0" indent="0">
-              <a:buNone/>
-            </a:pPr>
-            <a:r>
-              <a:rPr lang="en-US" sz="2800" b="1" dirty="0"/>
-              <a:t>Principle of Least Astonishment</a:t>
-            </a:r>
-          </a:p>
-          <a:p>
-            <a:pPr marL="0" indent="0">
-              <a:buNone/>
-            </a:pPr>
-            <a:endParaRPr lang="en-US" b="1" dirty="0"/>
-          </a:p>
-          <a:p>
-            <a:pPr marL="0" indent="0">
-              <a:buNone/>
-            </a:pPr>
-            <a:r>
-              <a:rPr lang="en-US" b="0" i="0" dirty="0">
-                <a:solidFill>
-                  <a:srgbClr val="242424"/>
-                </a:solidFill>
-                <a:effectLst/>
-                <a:highlight>
-                  <a:srgbClr val="FFFFFF"/>
-                </a:highlight>
-                <a:latin typeface="source-serif-pro"/>
-              </a:rPr>
-              <a:t>If a necessary feature has a high astonishment factor, it may be necessary to redesign the feature</a:t>
-            </a:r>
-            <a:endParaRPr lang="en-US" sz="2800" b="1" dirty="0"/>
-          </a:p>
-          <a:p>
-            <a:endParaRPr lang="en-US" dirty="0"/>
-          </a:p>
-        </p:txBody>
-      </p:sp>
-      <p:sp>
-        <p:nvSpPr>
-          <p:cNvPr id="9" name="Title 1">
-            <a:extLst>
-              <a:ext uri="{FF2B5EF4-FFF2-40B4-BE49-F238E27FC236}">
-                <a16:creationId xmlns:a16="http://schemas.microsoft.com/office/drawing/2014/main" id="{D75A8BAA-0BFB-8C77-CFE9-EF049C57F3B8}"/>
-              </a:ext>
-            </a:extLst>
-          </p:cNvPr>
-          <p:cNvSpPr>
-            <a:spLocks noGrp="1"/>
-          </p:cNvSpPr>
-          <p:nvPr>
-            <p:ph type="title"/>
-          </p:nvPr>
+          <p:cNvPr id="7" name="Title 1">
+            <a:extLst>
+              <a:ext uri="{FF2B5EF4-FFF2-40B4-BE49-F238E27FC236}">
+                <a16:creationId xmlns:a16="http://schemas.microsoft.com/office/drawing/2014/main" id="{BD61AC6F-AAD3-DAD8-258B-32976D02E7FF}"/>
+              </a:ext>
+            </a:extLst>
+          </p:cNvPr>
+          <p:cNvSpPr txBox="1">
+            <a:spLocks/>
+          </p:cNvSpPr>
+          <p:nvPr/>
         </p:nvSpPr>
         <p:spPr>
           <a:xfrm>
-            <a:off x="838200" y="320675"/>
-            <a:ext cx="10934700" cy="1325563"/>
+            <a:off x="628650" y="0"/>
+            <a:ext cx="10934700" cy="1393792"/>
           </a:xfrm>
+          <a:prstGeom prst="rect">
+            <a:avLst/>
+          </a:prstGeom>
         </p:spPr>
         <p:txBody>
-          <a:bodyPr>
+          <a:bodyPr vert="horz" lIns="91440" tIns="45720" rIns="91440" bIns="45720" rtlCol="0" anchor="ctr">
             <a:normAutofit/>
           </a:bodyPr>
-          <a:lstStyle/>
+          <a:lstStyle>
+            <a:lvl1pPr algn="l" defTabSz="914400" rtl="0" eaLnBrk="1" latinLnBrk="0" hangingPunct="1">
+              <a:lnSpc>
+                <a:spcPct val="90000"/>
+              </a:lnSpc>
+              <a:spcBef>
+                <a:spcPct val="0"/>
+              </a:spcBef>
+              <a:buNone/>
+              <a:defRPr sz="4400" kern="1200">
+                <a:solidFill>
+                  <a:schemeClr val="tx1"/>
+                </a:solidFill>
+                <a:latin typeface="+mj-lt"/>
+                <a:ea typeface="+mj-ea"/>
+                <a:cs typeface="+mj-cs"/>
+              </a:defRPr>
+            </a:lvl1pPr>
+          </a:lstStyle>
           <a:p>
             <a:r>
               <a:rPr lang="en-US" sz="4000"/>
@@ -7953,7 +8944,7 @@
     </p:spTree>
     <p:extLst>
       <p:ext uri="{BB962C8B-B14F-4D97-AF65-F5344CB8AC3E}">
-        <p14:creationId xmlns:p14="http://schemas.microsoft.com/office/powerpoint/2010/main" val="1921919947"/>
+        <p14:creationId xmlns:p14="http://schemas.microsoft.com/office/powerpoint/2010/main" val="1809636360"/>
       </p:ext>
     </p:extLst>
   </p:cSld>
@@ -8083,7 +9074,12 @@
             <p:ph idx="1"/>
           </p:nvPr>
         </p:nvSpPr>
-        <p:spPr/>
+        <p:spPr>
+          <a:xfrm>
+            <a:off x="838200" y="1393791"/>
+            <a:ext cx="10515600" cy="4783171"/>
+          </a:xfrm>
+        </p:spPr>
         <p:txBody>
           <a:bodyPr/>
           <a:lstStyle/>
@@ -8092,70 +9088,24 @@
               <a:buNone/>
             </a:pPr>
             <a:r>
-              <a:rPr lang="en-US" sz="2800" b="1" dirty="0"/>
-              <a:t>Information Hiding Principle</a:t>
+              <a:rPr lang="en-US" sz="2800" b="1"/>
+              <a:t>Liskov Substiution Principle</a:t>
             </a:r>
           </a:p>
           <a:p>
             <a:pPr marL="0" indent="0">
               <a:buNone/>
             </a:pPr>
-            <a:r>
-              <a:rPr lang="en-US" dirty="0"/>
-              <a:t>Related to encapsulation </a:t>
-            </a:r>
-            <a:r>
-              <a:rPr lang="en-US" dirty="0" err="1"/>
-              <a:t>oop</a:t>
-            </a:r>
-            <a:endParaRPr lang="en-US" sz="2800" dirty="0"/>
-          </a:p>
-          <a:p>
-            <a:endParaRPr lang="en-US" dirty="0"/>
-          </a:p>
-        </p:txBody>
-      </p:sp>
-      <p:sp>
-        <p:nvSpPr>
-          <p:cNvPr id="9" name="Title 1">
-            <a:extLst>
-              <a:ext uri="{FF2B5EF4-FFF2-40B4-BE49-F238E27FC236}">
-                <a16:creationId xmlns:a16="http://schemas.microsoft.com/office/drawing/2014/main" id="{BF0B79C9-5315-2D6B-FBF4-6F562E00B215}"/>
-              </a:ext>
-            </a:extLst>
-          </p:cNvPr>
-          <p:cNvSpPr>
-            <a:spLocks noGrp="1"/>
-          </p:cNvSpPr>
-          <p:nvPr>
-            <p:ph type="title"/>
-          </p:nvPr>
-        </p:nvSpPr>
-        <p:spPr>
-          <a:xfrm>
-            <a:off x="838200" y="320675"/>
-            <a:ext cx="10934700" cy="1325563"/>
-          </a:xfrm>
-        </p:spPr>
-        <p:txBody>
-          <a:bodyPr>
-            <a:normAutofit/>
-          </a:bodyPr>
-          <a:lstStyle/>
-          <a:p>
-            <a:r>
-              <a:rPr lang="en-US" sz="4000"/>
-              <a:t>Clean Code Grade Yellow Principles</a:t>
-            </a:r>
+            <a:endParaRPr lang="en-US"/>
           </a:p>
         </p:txBody>
       </p:sp>
       <p:pic>
         <p:nvPicPr>
-          <p:cNvPr id="4098" name="Picture 2">
-            <a:extLst>
-              <a:ext uri="{FF2B5EF4-FFF2-40B4-BE49-F238E27FC236}">
-                <a16:creationId xmlns:a16="http://schemas.microsoft.com/office/drawing/2014/main" id="{396E94BA-9E0D-E796-962F-6DAE703F2BBC}"/>
+          <p:cNvPr id="3074" name="Picture 2" descr="Mastering SOLID Principles: A Comprehensive Guide for Software Engineers -  InRhythm">
+            <a:extLst>
+              <a:ext uri="{FF2B5EF4-FFF2-40B4-BE49-F238E27FC236}">
+                <a16:creationId xmlns:a16="http://schemas.microsoft.com/office/drawing/2014/main" id="{722F67D6-760A-223A-CB55-D32BDD05F265}"/>
               </a:ext>
             </a:extLst>
           </p:cNvPr>
@@ -8179,8 +9129,8 @@
         </p:blipFill>
         <p:spPr bwMode="auto">
           <a:xfrm>
-            <a:off x="863996" y="2966382"/>
-            <a:ext cx="3759236" cy="2663687"/>
+            <a:off x="3899530" y="2015231"/>
+            <a:ext cx="4392939" cy="4161732"/>
           </a:xfrm>
           <a:prstGeom prst="rect">
             <a:avLst/>
@@ -8197,57 +9147,45 @@
           </a:extLst>
         </p:spPr>
       </p:pic>
-      <p:pic>
-        <p:nvPicPr>
-          <p:cNvPr id="4100" name="Picture 4">
-            <a:extLst>
-              <a:ext uri="{FF2B5EF4-FFF2-40B4-BE49-F238E27FC236}">
-                <a16:creationId xmlns:a16="http://schemas.microsoft.com/office/drawing/2014/main" id="{48B1364C-539F-382C-BDFB-6AD9BD45DD60}"/>
-              </a:ext>
-            </a:extLst>
-          </p:cNvPr>
-          <p:cNvPicPr>
-            <a:picLocks noChangeAspect="1" noChangeArrowheads="1"/>
-          </p:cNvPicPr>
-          <p:nvPr/>
-        </p:nvPicPr>
-        <p:blipFill>
-          <a:blip r:embed="rId3">
-            <a:extLst>
-              <a:ext uri="{28A0092B-C50C-407E-A947-70E740481C1C}">
-                <a14:useLocalDpi xmlns:a14="http://schemas.microsoft.com/office/drawing/2010/main" val="0"/>
-              </a:ext>
-            </a:extLst>
-          </a:blip>
-          <a:srcRect/>
-          <a:stretch>
-            <a:fillRect/>
-          </a:stretch>
-        </p:blipFill>
-        <p:spPr bwMode="auto">
+      <p:sp>
+        <p:nvSpPr>
+          <p:cNvPr id="12" name="Title 1">
+            <a:extLst>
+              <a:ext uri="{FF2B5EF4-FFF2-40B4-BE49-F238E27FC236}">
+                <a16:creationId xmlns:a16="http://schemas.microsoft.com/office/drawing/2014/main" id="{E4C899C8-6DEA-4EE3-36A9-EAC72A9D98E5}"/>
+              </a:ext>
+            </a:extLst>
+          </p:cNvPr>
+          <p:cNvSpPr>
+            <a:spLocks noGrp="1"/>
+          </p:cNvSpPr>
+          <p:nvPr>
+            <p:ph type="title"/>
+          </p:nvPr>
+        </p:nvSpPr>
+        <p:spPr>
           <a:xfrm>
-            <a:off x="5186362" y="2919413"/>
-            <a:ext cx="5934075" cy="3257550"/>
+            <a:off x="628650" y="0"/>
+            <a:ext cx="10934700" cy="1393792"/>
           </a:xfrm>
-          <a:prstGeom prst="rect">
-            <a:avLst/>
-          </a:prstGeom>
-          <a:noFill/>
-          <a:extLst>
-            <a:ext uri="{909E8E84-426E-40DD-AFC4-6F175D3DCCD1}">
-              <a14:hiddenFill xmlns:a14="http://schemas.microsoft.com/office/drawing/2010/main">
-                <a:solidFill>
-                  <a:srgbClr val="FFFFFF"/>
-                </a:solidFill>
-              </a14:hiddenFill>
-            </a:ext>
-          </a:extLst>
         </p:spPr>
-      </p:pic>
+        <p:txBody>
+          <a:bodyPr>
+            <a:normAutofit/>
+          </a:bodyPr>
+          <a:lstStyle/>
+          <a:p>
+            <a:r>
+              <a:rPr lang="en-US" sz="4000"/>
+              <a:t>Clean Code Grade Yellow Principles</a:t>
+            </a:r>
+          </a:p>
+        </p:txBody>
+      </p:sp>
     </p:spTree>
     <p:extLst>
       <p:ext uri="{BB962C8B-B14F-4D97-AF65-F5344CB8AC3E}">
-        <p14:creationId xmlns:p14="http://schemas.microsoft.com/office/powerpoint/2010/main" val="1063465789"/>
+        <p14:creationId xmlns:p14="http://schemas.microsoft.com/office/powerpoint/2010/main" val="487391509"/>
       </p:ext>
     </p:extLst>
   </p:cSld>
@@ -9121,15 +10059,6 @@
 </file>
 
 <file path=customXml/item1.xml><?xml version="1.0" encoding="utf-8"?>
-<?mso-contentType ?>
-<FormTemplates xmlns="http://schemas.microsoft.com/sharepoint/v3/contenttype/forms">
-  <Display>DocumentLibraryForm</Display>
-  <Edit>DocumentLibraryForm</Edit>
-  <New>DocumentLibraryForm</New>
-</FormTemplates>
-</file>
-
-<file path=customXml/item2.xml><?xml version="1.0" encoding="utf-8"?>
 <p:properties xmlns:p="http://schemas.microsoft.com/office/2006/metadata/properties" xmlns:xsi="http://www.w3.org/2001/XMLSchema-instance" xmlns:pc="http://schemas.microsoft.com/office/infopath/2007/PartnerControls">
   <documentManagement>
     <TaxCatchAll xmlns="231742ab-05ec-4f96-a981-a771f0dc5ac4" xsi:nil="true"/>
@@ -9138,6 +10067,15 @@
     </lcf76f155ced4ddcb4097134ff3c332f>
   </documentManagement>
 </p:properties>
+</file>
+
+<file path=customXml/item2.xml><?xml version="1.0" encoding="utf-8"?>
+<?mso-contentType ?>
+<FormTemplates xmlns="http://schemas.microsoft.com/sharepoint/v3/contenttype/forms">
+  <Display>DocumentLibraryForm</Display>
+  <Edit>DocumentLibraryForm</Edit>
+  <New>DocumentLibraryForm</New>
+</FormTemplates>
 </file>
 
 <file path=customXml/item3.xml><?xml version="1.0" encoding="utf-8"?>
@@ -9356,20 +10294,20 @@
 </file>
 
 <file path=customXml/itemProps1.xml><?xml version="1.0" encoding="utf-8"?>
-<ds:datastoreItem xmlns:ds="http://schemas.openxmlformats.org/officeDocument/2006/customXml" ds:itemID="{A373C971-40AF-4018-B4E4-CFAD404470C3}">
-  <ds:schemaRefs>
-    <ds:schemaRef ds:uri="http://schemas.microsoft.com/sharepoint/v3/contenttype/forms"/>
-  </ds:schemaRefs>
-</ds:datastoreItem>
-</file>
-
-<file path=customXml/itemProps2.xml><?xml version="1.0" encoding="utf-8"?>
 <ds:datastoreItem xmlns:ds="http://schemas.openxmlformats.org/officeDocument/2006/customXml" ds:itemID="{65DB626F-72E2-49BA-8CB3-D64BACF09F7B}">
   <ds:schemaRefs>
     <ds:schemaRef ds:uri="http://schemas.microsoft.com/office/2006/metadata/properties"/>
     <ds:schemaRef ds:uri="http://schemas.microsoft.com/office/infopath/2007/PartnerControls"/>
     <ds:schemaRef ds:uri="231742ab-05ec-4f96-a981-a771f0dc5ac4"/>
     <ds:schemaRef ds:uri="f629341c-4cde-4c27-8491-b27ba532aee8"/>
+  </ds:schemaRefs>
+</ds:datastoreItem>
+</file>
+
+<file path=customXml/itemProps2.xml><?xml version="1.0" encoding="utf-8"?>
+<ds:datastoreItem xmlns:ds="http://schemas.openxmlformats.org/officeDocument/2006/customXml" ds:itemID="{A373C971-40AF-4018-B4E4-CFAD404470C3}">
+  <ds:schemaRefs>
+    <ds:schemaRef ds:uri="http://schemas.microsoft.com/sharepoint/v3/contenttype/forms"/>
   </ds:schemaRefs>
 </ds:datastoreItem>
 </file>
